--- a/M223_Presentation.pptx
+++ b/M223_Presentation.pptx
@@ -13,6 +13,7 @@
     <p:sldId id="261" r:id="rId12"/>
     <p:sldId id="262" r:id="rId13"/>
     <p:sldId id="263" r:id="rId14"/>
+    <p:sldId id="264" r:id="rId15"/>
   </p:sldIdLst>
   <p:sldSz cx="9144000" cy="5143500" type="screen4x3"/>
   <p:notesSz cx="6858000" cy="9144000"/>
@@ -3091,7 +3092,7 @@
     <p:bg>
       <p:bgPr>
         <a:solidFill>
-          <a:srgbClr val="1E3A5F"/>
+          <a:srgbClr val="1E2761"/>
         </a:solidFill>
         <a:effectLst/>
       </p:bgPr>
@@ -3112,7 +3113,7 @@
         <p:spPr>
           <a:xfrm>
             <a:off x="457200" y="1371600"/>
-            <a:ext cx="8229600" cy="914400"/>
+            <a:ext cx="8229600" cy="1097280"/>
           </a:xfrm>
           <a:prstGeom prst="rect">
             <a:avLst/>
@@ -3125,7 +3126,7 @@
           </a:bodyPr>
           <a:lstStyle/>
           <a:p>
-            <a:pPr algn="ctr">
+            <a:pPr>
               <a:defRPr sz="5400" b="1">
                 <a:solidFill>
                   <a:srgbClr val="FFFFFF"/>
@@ -3133,7 +3134,7 @@
               </a:defRPr>
             </a:pPr>
             <a:r>
-              <a:t>Steam Library</a:t>
+              <a:t>Steam Library Manager</a:t>
             </a:r>
           </a:p>
         </p:txBody>
@@ -3146,8 +3147,8 @@
         </p:nvSpPr>
         <p:spPr>
           <a:xfrm>
-            <a:off x="457200" y="2286000"/>
-            <a:ext cx="8229600" cy="640080"/>
+            <a:off x="457200" y="2560320"/>
+            <a:ext cx="8229600" cy="548640"/>
           </a:xfrm>
           <a:prstGeom prst="rect">
             <a:avLst/>
@@ -3160,15 +3161,15 @@
           </a:bodyPr>
           <a:lstStyle/>
           <a:p>
-            <a:pPr algn="ctr">
+            <a:pPr>
               <a:defRPr sz="2800">
                 <a:solidFill>
-                  <a:srgbClr val="4A90E2"/>
+                  <a:srgbClr val="90E0EF"/>
                 </a:solidFill>
               </a:defRPr>
             </a:pPr>
             <a:r>
-              <a:t>M223: JWT Authentication &amp; Game Management</a:t>
+              <a:t>JWT Authentication &amp; RBAC Implementation</a:t>
             </a:r>
           </a:p>
         </p:txBody>
@@ -3181,7 +3182,7 @@
         </p:nvSpPr>
         <p:spPr>
           <a:xfrm>
-            <a:off x="457200" y="3931920"/>
+            <a:off x="457200" y="3840480"/>
             <a:ext cx="8229600" cy="457200"/>
           </a:xfrm>
           <a:prstGeom prst="rect">
@@ -3195,16 +3196,61 @@
           </a:bodyPr>
           <a:lstStyle/>
           <a:p>
-            <a:pPr algn="ctr">
-              <a:defRPr sz="1600" i="1">
-                <a:solidFill>
-                  <a:srgbClr val="FFFFFF"/>
+            <a:pPr>
+              <a:defRPr sz="1800">
+                <a:solidFill>
+                  <a:srgbClr val="90E0EF"/>
                 </a:solidFill>
               </a:defRPr>
             </a:pPr>
             <a:r>
-              <a:t>Philipp Seewer | LB Projekt M295</a:t>
-            </a:r>
+              <a:t>M223 Projekt | Philipp Seewer</a:t>
+            </a:r>
+          </a:p>
+        </p:txBody>
+      </p:sp>
+      <p:sp>
+        <p:nvSpPr>
+          <p:cNvPr id="5" name="Rectangle 4"/>
+          <p:cNvSpPr/>
+          <p:nvPr/>
+        </p:nvSpPr>
+        <p:spPr>
+          <a:xfrm>
+            <a:off x="457200" y="1188720"/>
+            <a:ext cx="2743200" cy="73152"/>
+          </a:xfrm>
+          <a:prstGeom prst="rect">
+            <a:avLst/>
+          </a:prstGeom>
+          <a:solidFill>
+            <a:srgbClr val="00B4D8"/>
+          </a:solidFill>
+          <a:ln>
+            <a:solidFill>
+              <a:srgbClr val="00B4D8"/>
+            </a:solidFill>
+          </a:ln>
+        </p:spPr>
+        <p:style>
+          <a:lnRef idx="1">
+            <a:schemeClr val="accent1"/>
+          </a:lnRef>
+          <a:fillRef idx="3">
+            <a:schemeClr val="accent1"/>
+          </a:fillRef>
+          <a:effectRef idx="2">
+            <a:schemeClr val="accent1"/>
+          </a:effectRef>
+          <a:fontRef idx="minor">
+            <a:schemeClr val="lt1"/>
+          </a:fontRef>
+        </p:style>
+        <p:txBody>
+          <a:bodyPr rtlCol="0" anchor="ctr"/>
+          <a:lstStyle/>
+          <a:p>
+            <a:pPr algn="ctr"/>
           </a:p>
         </p:txBody>
       </p:sp>
@@ -3249,11 +3295,11 @@
             <a:avLst/>
           </a:prstGeom>
           <a:solidFill>
-            <a:srgbClr val="1E3A5F"/>
+            <a:srgbClr val="1E2761"/>
           </a:solidFill>
           <a:ln>
             <a:solidFill>
-              <a:srgbClr val="1E3A5F"/>
+              <a:srgbClr val="1E2761"/>
             </a:solidFill>
           </a:ln>
         </p:spPr>
@@ -3281,14 +3327,59 @@
       </p:sp>
       <p:sp>
         <p:nvSpPr>
-          <p:cNvPr id="3" name="TextBox 2"/>
+          <p:cNvPr id="3" name="Rectangle 2"/>
+          <p:cNvSpPr/>
+          <p:nvPr/>
+        </p:nvSpPr>
+        <p:spPr>
+          <a:xfrm>
+            <a:off x="640080" y="1188720"/>
+            <a:ext cx="2560320" cy="822960"/>
+          </a:xfrm>
+          <a:prstGeom prst="rect">
+            <a:avLst/>
+          </a:prstGeom>
+          <a:solidFill>
+            <a:srgbClr val="00B4D8"/>
+          </a:solidFill>
+          <a:ln>
+            <a:solidFill>
+              <a:srgbClr val="00B4D8"/>
+            </a:solidFill>
+          </a:ln>
+        </p:spPr>
+        <p:style>
+          <a:lnRef idx="1">
+            <a:schemeClr val="accent1"/>
+          </a:lnRef>
+          <a:fillRef idx="3">
+            <a:schemeClr val="accent1"/>
+          </a:fillRef>
+          <a:effectRef idx="2">
+            <a:schemeClr val="accent1"/>
+          </a:effectRef>
+          <a:fontRef idx="minor">
+            <a:schemeClr val="lt1"/>
+          </a:fontRef>
+        </p:style>
+        <p:txBody>
+          <a:bodyPr rtlCol="0" anchor="ctr"/>
+          <a:lstStyle/>
+          <a:p>
+            <a:pPr algn="ctr"/>
+          </a:p>
+        </p:txBody>
+      </p:sp>
+      <p:sp>
+        <p:nvSpPr>
+          <p:cNvPr id="4" name="TextBox 3"/>
           <p:cNvSpPr txBox="1"/>
           <p:nvPr/>
         </p:nvSpPr>
         <p:spPr>
           <a:xfrm>
-            <a:off x="457200" y="137160"/>
-            <a:ext cx="8229600" cy="457200"/>
+            <a:off x="731519" y="1325880"/>
+            <a:ext cx="2377440" cy="548640"/>
           </a:xfrm>
           <a:prstGeom prst="rect">
             <a:avLst/>
@@ -3301,86 +3392,61 @@
           </a:bodyPr>
           <a:lstStyle/>
           <a:p>
-            <a:pPr>
-              <a:defRPr sz="3200" b="1">
+            <a:pPr algn="ctr">
+              <a:defRPr sz="1800" b="1">
                 <a:solidFill>
                   <a:srgbClr val="FFFFFF"/>
                 </a:solidFill>
               </a:defRPr>
             </a:pPr>
             <a:r>
-              <a:t>Projektübersicht</a:t>
-            </a:r>
-          </a:p>
-        </p:txBody>
-      </p:sp>
-      <p:sp>
-        <p:nvSpPr>
-          <p:cNvPr id="4" name="TextBox 3"/>
-          <p:cNvSpPr txBox="1"/>
-          <p:nvPr/>
-        </p:nvSpPr>
-        <p:spPr>
-          <a:xfrm>
-            <a:off x="914400" y="1097280"/>
-            <a:ext cx="7772400" cy="548640"/>
-          </a:xfrm>
-          <a:prstGeom prst="rect">
-            <a:avLst/>
-          </a:prstGeom>
-          <a:noFill/>
-        </p:spPr>
-        <p:txBody>
-          <a:bodyPr wrap="square">
-            <a:spAutoFit/>
-          </a:bodyPr>
-          <a:lstStyle/>
-          <a:p>
-            <a:pPr>
-              <a:defRPr sz="1800">
-                <a:solidFill>
-                  <a:srgbClr val="2C3E50"/>
-                </a:solidFill>
-              </a:defRPr>
-            </a:pPr>
-            <a:r>
-              <a:t>✓ Spring Boot Backend mit JWT-Authentifizierung</a:t>
-            </a:r>
-          </a:p>
-        </p:txBody>
-      </p:sp>
-      <p:sp>
-        <p:nvSpPr>
-          <p:cNvPr id="5" name="TextBox 4"/>
-          <p:cNvSpPr txBox="1"/>
-          <p:nvPr/>
-        </p:nvSpPr>
-        <p:spPr>
-          <a:xfrm>
-            <a:off x="914400" y="1691640"/>
-            <a:ext cx="7772400" cy="548640"/>
-          </a:xfrm>
-          <a:prstGeom prst="rect">
-            <a:avLst/>
-          </a:prstGeom>
-          <a:noFill/>
-        </p:spPr>
-        <p:txBody>
-          <a:bodyPr wrap="square">
-            <a:spAutoFit/>
-          </a:bodyPr>
-          <a:lstStyle/>
-          <a:p>
-            <a:pPr>
-              <a:defRPr sz="1800">
-                <a:solidFill>
-                  <a:srgbClr val="2C3E50"/>
-                </a:solidFill>
-              </a:defRPr>
-            </a:pPr>
-            <a:r>
-              <a:t>✓ React Frontend mit Auth Context</a:t>
-            </a:r>
+              <a:t>Spring Boot 3</a:t>
+            </a:r>
+          </a:p>
+        </p:txBody>
+      </p:sp>
+      <p:sp>
+        <p:nvSpPr>
+          <p:cNvPr id="5" name="Rectangle 4"/>
+          <p:cNvSpPr/>
+          <p:nvPr/>
+        </p:nvSpPr>
+        <p:spPr>
+          <a:xfrm>
+            <a:off x="3383280" y="1188720"/>
+            <a:ext cx="2560320" cy="822960"/>
+          </a:xfrm>
+          <a:prstGeom prst="rect">
+            <a:avLst/>
+          </a:prstGeom>
+          <a:solidFill>
+            <a:srgbClr val="00B4D8"/>
+          </a:solidFill>
+          <a:ln>
+            <a:solidFill>
+              <a:srgbClr val="00B4D8"/>
+            </a:solidFill>
+          </a:ln>
+        </p:spPr>
+        <p:style>
+          <a:lnRef idx="1">
+            <a:schemeClr val="accent1"/>
+          </a:lnRef>
+          <a:fillRef idx="3">
+            <a:schemeClr val="accent1"/>
+          </a:fillRef>
+          <a:effectRef idx="2">
+            <a:schemeClr val="accent1"/>
+          </a:effectRef>
+          <a:fontRef idx="minor">
+            <a:schemeClr val="lt1"/>
+          </a:fontRef>
+        </p:style>
+        <p:txBody>
+          <a:bodyPr rtlCol="0" anchor="ctr"/>
+          <a:lstStyle/>
+          <a:p>
+            <a:pPr algn="ctr"/>
           </a:p>
         </p:txBody>
       </p:sp>
@@ -3392,8 +3458,8 @@
         </p:nvSpPr>
         <p:spPr>
           <a:xfrm>
-            <a:off x="914400" y="2286000"/>
-            <a:ext cx="7772400" cy="548640"/>
+            <a:off x="3474720" y="1325880"/>
+            <a:ext cx="2377440" cy="548640"/>
           </a:xfrm>
           <a:prstGeom prst="rect">
             <a:avLst/>
@@ -3401,56 +3467,66 @@
           <a:noFill/>
         </p:spPr>
         <p:txBody>
-          <a:bodyPr wrap="square">
+          <a:bodyPr wrap="none">
             <a:spAutoFit/>
           </a:bodyPr>
           <a:lstStyle/>
           <a:p>
-            <a:pPr>
-              <a:defRPr sz="1800">
-                <a:solidFill>
-                  <a:srgbClr val="2C3E50"/>
+            <a:pPr algn="ctr">
+              <a:defRPr sz="1800" b="1">
+                <a:solidFill>
+                  <a:srgbClr val="FFFFFF"/>
                 </a:solidFill>
               </a:defRPr>
             </a:pPr>
             <a:r>
-              <a:t>✓ Role-Based Access Control (RBAC)</a:t>
-            </a:r>
-          </a:p>
-        </p:txBody>
-      </p:sp>
-      <p:sp>
-        <p:nvSpPr>
-          <p:cNvPr id="7" name="TextBox 6"/>
-          <p:cNvSpPr txBox="1"/>
-          <p:nvPr/>
-        </p:nvSpPr>
-        <p:spPr>
-          <a:xfrm>
-            <a:off x="914400" y="2880360"/>
-            <a:ext cx="7772400" cy="548640"/>
-          </a:xfrm>
-          <a:prstGeom prst="rect">
-            <a:avLst/>
-          </a:prstGeom>
-          <a:noFill/>
-        </p:spPr>
-        <p:txBody>
-          <a:bodyPr wrap="square">
-            <a:spAutoFit/>
-          </a:bodyPr>
-          <a:lstStyle/>
-          <a:p>
-            <a:pPr>
-              <a:defRPr sz="1800">
-                <a:solidFill>
-                  <a:srgbClr val="2C3E50"/>
-                </a:solidFill>
-              </a:defRPr>
-            </a:pPr>
-            <a:r>
-              <a:t>✓ Game CRUD Operations</a:t>
-            </a:r>
+              <a:t>React 18</a:t>
+            </a:r>
+          </a:p>
+        </p:txBody>
+      </p:sp>
+      <p:sp>
+        <p:nvSpPr>
+          <p:cNvPr id="7" name="Rectangle 6"/>
+          <p:cNvSpPr/>
+          <p:nvPr/>
+        </p:nvSpPr>
+        <p:spPr>
+          <a:xfrm>
+            <a:off x="6126480" y="1188720"/>
+            <a:ext cx="2560320" cy="822960"/>
+          </a:xfrm>
+          <a:prstGeom prst="rect">
+            <a:avLst/>
+          </a:prstGeom>
+          <a:solidFill>
+            <a:srgbClr val="00B4D8"/>
+          </a:solidFill>
+          <a:ln>
+            <a:solidFill>
+              <a:srgbClr val="00B4D8"/>
+            </a:solidFill>
+          </a:ln>
+        </p:spPr>
+        <p:style>
+          <a:lnRef idx="1">
+            <a:schemeClr val="accent1"/>
+          </a:lnRef>
+          <a:fillRef idx="3">
+            <a:schemeClr val="accent1"/>
+          </a:fillRef>
+          <a:effectRef idx="2">
+            <a:schemeClr val="accent1"/>
+          </a:effectRef>
+          <a:fontRef idx="minor">
+            <a:schemeClr val="lt1"/>
+          </a:fontRef>
+        </p:style>
+        <p:txBody>
+          <a:bodyPr rtlCol="0" anchor="ctr"/>
+          <a:lstStyle/>
+          <a:p>
+            <a:pPr algn="ctr"/>
           </a:p>
         </p:txBody>
       </p:sp>
@@ -3462,8 +3538,8 @@
         </p:nvSpPr>
         <p:spPr>
           <a:xfrm>
-            <a:off x="914400" y="3474720"/>
-            <a:ext cx="7772400" cy="548640"/>
+            <a:off x="6217920" y="1325880"/>
+            <a:ext cx="2377440" cy="548640"/>
           </a:xfrm>
           <a:prstGeom prst="rect">
             <a:avLst/>
@@ -3471,20 +3547,260 @@
           <a:noFill/>
         </p:spPr>
         <p:txBody>
-          <a:bodyPr wrap="square">
+          <a:bodyPr wrap="none">
             <a:spAutoFit/>
           </a:bodyPr>
           <a:lstStyle/>
           <a:p>
-            <a:pPr>
-              <a:defRPr sz="1800">
-                <a:solidFill>
-                  <a:srgbClr val="2C3E50"/>
+            <a:pPr algn="ctr">
+              <a:defRPr sz="1800" b="1">
+                <a:solidFill>
+                  <a:srgbClr val="FFFFFF"/>
                 </a:solidFill>
               </a:defRPr>
             </a:pPr>
             <a:r>
-              <a:t>✓ MySQL Datenbank</a:t>
+              <a:t>JWT + BCrypt</a:t>
+            </a:r>
+          </a:p>
+        </p:txBody>
+      </p:sp>
+      <p:sp>
+        <p:nvSpPr>
+          <p:cNvPr id="9" name="Rectangle 8"/>
+          <p:cNvSpPr/>
+          <p:nvPr/>
+        </p:nvSpPr>
+        <p:spPr>
+          <a:xfrm>
+            <a:off x="640080" y="2377440"/>
+            <a:ext cx="2560320" cy="822960"/>
+          </a:xfrm>
+          <a:prstGeom prst="rect">
+            <a:avLst/>
+          </a:prstGeom>
+          <a:solidFill>
+            <a:srgbClr val="90E0EF"/>
+          </a:solidFill>
+          <a:ln>
+            <a:solidFill>
+              <a:srgbClr val="90E0EF"/>
+            </a:solidFill>
+          </a:ln>
+        </p:spPr>
+        <p:style>
+          <a:lnRef idx="1">
+            <a:schemeClr val="accent1"/>
+          </a:lnRef>
+          <a:fillRef idx="3">
+            <a:schemeClr val="accent1"/>
+          </a:fillRef>
+          <a:effectRef idx="2">
+            <a:schemeClr val="accent1"/>
+          </a:effectRef>
+          <a:fontRef idx="minor">
+            <a:schemeClr val="lt1"/>
+          </a:fontRef>
+        </p:style>
+        <p:txBody>
+          <a:bodyPr rtlCol="0" anchor="ctr"/>
+          <a:lstStyle/>
+          <a:p>
+            <a:pPr algn="ctr"/>
+          </a:p>
+        </p:txBody>
+      </p:sp>
+      <p:sp>
+        <p:nvSpPr>
+          <p:cNvPr id="10" name="TextBox 9"/>
+          <p:cNvSpPr txBox="1"/>
+          <p:nvPr/>
+        </p:nvSpPr>
+        <p:spPr>
+          <a:xfrm>
+            <a:off x="731519" y="2514600"/>
+            <a:ext cx="2377440" cy="548640"/>
+          </a:xfrm>
+          <a:prstGeom prst="rect">
+            <a:avLst/>
+          </a:prstGeom>
+          <a:noFill/>
+        </p:spPr>
+        <p:txBody>
+          <a:bodyPr wrap="none">
+            <a:spAutoFit/>
+          </a:bodyPr>
+          <a:lstStyle/>
+          <a:p>
+            <a:pPr algn="ctr">
+              <a:defRPr sz="1800" b="1">
+                <a:solidFill>
+                  <a:srgbClr val="FFFFFF"/>
+                </a:solidFill>
+              </a:defRPr>
+            </a:pPr>
+            <a:r>
+              <a:t>MySQL 8</a:t>
+            </a:r>
+          </a:p>
+        </p:txBody>
+      </p:sp>
+      <p:sp>
+        <p:nvSpPr>
+          <p:cNvPr id="11" name="Rectangle 10"/>
+          <p:cNvSpPr/>
+          <p:nvPr/>
+        </p:nvSpPr>
+        <p:spPr>
+          <a:xfrm>
+            <a:off x="3383280" y="2377440"/>
+            <a:ext cx="2560320" cy="822960"/>
+          </a:xfrm>
+          <a:prstGeom prst="rect">
+            <a:avLst/>
+          </a:prstGeom>
+          <a:solidFill>
+            <a:srgbClr val="00B4D8"/>
+          </a:solidFill>
+          <a:ln>
+            <a:solidFill>
+              <a:srgbClr val="00B4D8"/>
+            </a:solidFill>
+          </a:ln>
+        </p:spPr>
+        <p:style>
+          <a:lnRef idx="1">
+            <a:schemeClr val="accent1"/>
+          </a:lnRef>
+          <a:fillRef idx="3">
+            <a:schemeClr val="accent1"/>
+          </a:fillRef>
+          <a:effectRef idx="2">
+            <a:schemeClr val="accent1"/>
+          </a:effectRef>
+          <a:fontRef idx="minor">
+            <a:schemeClr val="lt1"/>
+          </a:fontRef>
+        </p:style>
+        <p:txBody>
+          <a:bodyPr rtlCol="0" anchor="ctr"/>
+          <a:lstStyle/>
+          <a:p>
+            <a:pPr algn="ctr"/>
+          </a:p>
+        </p:txBody>
+      </p:sp>
+      <p:sp>
+        <p:nvSpPr>
+          <p:cNvPr id="12" name="TextBox 11"/>
+          <p:cNvSpPr txBox="1"/>
+          <p:nvPr/>
+        </p:nvSpPr>
+        <p:spPr>
+          <a:xfrm>
+            <a:off x="3474720" y="2514600"/>
+            <a:ext cx="2377440" cy="548640"/>
+          </a:xfrm>
+          <a:prstGeom prst="rect">
+            <a:avLst/>
+          </a:prstGeom>
+          <a:noFill/>
+        </p:spPr>
+        <p:txBody>
+          <a:bodyPr wrap="none">
+            <a:spAutoFit/>
+          </a:bodyPr>
+          <a:lstStyle/>
+          <a:p>
+            <a:pPr algn="ctr">
+              <a:defRPr sz="1800" b="1">
+                <a:solidFill>
+                  <a:srgbClr val="FFFFFF"/>
+                </a:solidFill>
+              </a:defRPr>
+            </a:pPr>
+            <a:r>
+              <a:t>JPA/Hibernate</a:t>
+            </a:r>
+          </a:p>
+        </p:txBody>
+      </p:sp>
+      <p:sp>
+        <p:nvSpPr>
+          <p:cNvPr id="13" name="Rectangle 12"/>
+          <p:cNvSpPr/>
+          <p:nvPr/>
+        </p:nvSpPr>
+        <p:spPr>
+          <a:xfrm>
+            <a:off x="6126480" y="2377440"/>
+            <a:ext cx="2560320" cy="822960"/>
+          </a:xfrm>
+          <a:prstGeom prst="rect">
+            <a:avLst/>
+          </a:prstGeom>
+          <a:solidFill>
+            <a:srgbClr val="90E0EF"/>
+          </a:solidFill>
+          <a:ln>
+            <a:solidFill>
+              <a:srgbClr val="90E0EF"/>
+            </a:solidFill>
+          </a:ln>
+        </p:spPr>
+        <p:style>
+          <a:lnRef idx="1">
+            <a:schemeClr val="accent1"/>
+          </a:lnRef>
+          <a:fillRef idx="3">
+            <a:schemeClr val="accent1"/>
+          </a:fillRef>
+          <a:effectRef idx="2">
+            <a:schemeClr val="accent1"/>
+          </a:effectRef>
+          <a:fontRef idx="minor">
+            <a:schemeClr val="lt1"/>
+          </a:fontRef>
+        </p:style>
+        <p:txBody>
+          <a:bodyPr rtlCol="0" anchor="ctr"/>
+          <a:lstStyle/>
+          <a:p>
+            <a:pPr algn="ctr"/>
+          </a:p>
+        </p:txBody>
+      </p:sp>
+      <p:sp>
+        <p:nvSpPr>
+          <p:cNvPr id="14" name="TextBox 13"/>
+          <p:cNvSpPr txBox="1"/>
+          <p:nvPr/>
+        </p:nvSpPr>
+        <p:spPr>
+          <a:xfrm>
+            <a:off x="6217920" y="2514600"/>
+            <a:ext cx="2377440" cy="548640"/>
+          </a:xfrm>
+          <a:prstGeom prst="rect">
+            <a:avLst/>
+          </a:prstGeom>
+          <a:noFill/>
+        </p:spPr>
+        <p:txBody>
+          <a:bodyPr wrap="none">
+            <a:spAutoFit/>
+          </a:bodyPr>
+          <a:lstStyle/>
+          <a:p>
+            <a:pPr algn="ctr">
+              <a:defRPr sz="1800" b="1">
+                <a:solidFill>
+                  <a:srgbClr val="FFFFFF"/>
+                </a:solidFill>
+              </a:defRPr>
+            </a:pPr>
+            <a:r>
+              <a:t>TailwindCSS</a:t>
             </a:r>
           </a:p>
         </p:txBody>
@@ -3530,11 +3846,11 @@
             <a:avLst/>
           </a:prstGeom>
           <a:solidFill>
-            <a:srgbClr val="1E3A5F"/>
+            <a:srgbClr val="1E2761"/>
           </a:solidFill>
           <a:ln>
             <a:solidFill>
-              <a:srgbClr val="1E3A5F"/>
+              <a:srgbClr val="1E2761"/>
             </a:solidFill>
           </a:ln>
         </p:spPr>
@@ -3583,50 +3899,60 @@
           <a:lstStyle/>
           <a:p>
             <a:pPr>
-              <a:defRPr sz="3200" b="1">
+              <a:defRPr sz="3600" b="1">
                 <a:solidFill>
                   <a:srgbClr val="FFFFFF"/>
                 </a:solidFill>
               </a:defRPr>
             </a:pPr>
             <a:r>
-              <a:t>System-Architektur</a:t>
-            </a:r>
-          </a:p>
-        </p:txBody>
-      </p:sp>
-      <p:sp>
-        <p:nvSpPr>
-          <p:cNvPr id="4" name="TextBox 3"/>
-          <p:cNvSpPr txBox="1"/>
-          <p:nvPr/>
-        </p:nvSpPr>
-        <p:spPr>
-          <a:xfrm>
-            <a:off x="914400" y="1097280"/>
-            <a:ext cx="7772400" cy="548640"/>
-          </a:xfrm>
-          <a:prstGeom prst="rect">
-            <a:avLst/>
-          </a:prstGeom>
-          <a:noFill/>
-        </p:spPr>
-        <p:txBody>
-          <a:bodyPr wrap="square">
-            <a:spAutoFit/>
-          </a:bodyPr>
-          <a:lstStyle/>
-          <a:p>
-            <a:pPr>
-              <a:defRPr sz="1800">
-                <a:solidFill>
-                  <a:srgbClr val="2C3E50"/>
-                </a:solidFill>
-              </a:defRPr>
-            </a:pPr>
-            <a:r>
-              <a:t>Frontend (React): AuthContext, JWT Storage, Games UI</a:t>
-            </a:r>
+              <a:t>System Architecture</a:t>
+            </a:r>
+          </a:p>
+        </p:txBody>
+      </p:sp>
+      <p:sp>
+        <p:nvSpPr>
+          <p:cNvPr id="4" name="Rectangle 3"/>
+          <p:cNvSpPr/>
+          <p:nvPr/>
+        </p:nvSpPr>
+        <p:spPr>
+          <a:xfrm>
+            <a:off x="457200" y="1371600"/>
+            <a:ext cx="2560320" cy="1645920"/>
+          </a:xfrm>
+          <a:prstGeom prst="rect">
+            <a:avLst/>
+          </a:prstGeom>
+          <a:solidFill>
+            <a:srgbClr val="CADCFC"/>
+          </a:solidFill>
+          <a:ln w="25400">
+            <a:solidFill>
+              <a:srgbClr val="1E2761"/>
+            </a:solidFill>
+          </a:ln>
+        </p:spPr>
+        <p:style>
+          <a:lnRef idx="1">
+            <a:schemeClr val="accent1"/>
+          </a:lnRef>
+          <a:fillRef idx="3">
+            <a:schemeClr val="accent1"/>
+          </a:fillRef>
+          <a:effectRef idx="2">
+            <a:schemeClr val="accent1"/>
+          </a:effectRef>
+          <a:fontRef idx="minor">
+            <a:schemeClr val="lt1"/>
+          </a:fontRef>
+        </p:style>
+        <p:txBody>
+          <a:bodyPr rtlCol="0" anchor="ctr"/>
+          <a:lstStyle/>
+          <a:p>
+            <a:pPr algn="ctr"/>
           </a:p>
         </p:txBody>
       </p:sp>
@@ -3638,8 +3964,8 @@
         </p:nvSpPr>
         <p:spPr>
           <a:xfrm>
-            <a:off x="914400" y="1691640"/>
-            <a:ext cx="7772400" cy="548640"/>
+            <a:off x="548640" y="1508760"/>
+            <a:ext cx="2377440" cy="320040"/>
           </a:xfrm>
           <a:prstGeom prst="rect">
             <a:avLst/>
@@ -3647,20 +3973,20 @@
           <a:noFill/>
         </p:spPr>
         <p:txBody>
-          <a:bodyPr wrap="square">
+          <a:bodyPr wrap="none">
             <a:spAutoFit/>
           </a:bodyPr>
           <a:lstStyle/>
           <a:p>
             <a:pPr>
-              <a:defRPr sz="1800">
-                <a:solidFill>
-                  <a:srgbClr val="2C3E50"/>
+              <a:defRPr sz="1400" b="1">
+                <a:solidFill>
+                  <a:srgbClr val="1E2761"/>
                 </a:solidFill>
               </a:defRPr>
             </a:pPr>
             <a:r>
-              <a:t>↓ API Requests mit Authorization Header ↓</a:t>
+              <a:t>React Frontend</a:t>
             </a:r>
           </a:p>
         </p:txBody>
@@ -3673,8 +3999,8 @@
         </p:nvSpPr>
         <p:spPr>
           <a:xfrm>
-            <a:off x="914400" y="2286000"/>
-            <a:ext cx="7772400" cy="548640"/>
+            <a:off x="594360" y="1965960"/>
+            <a:ext cx="2286000" cy="914400"/>
           </a:xfrm>
           <a:prstGeom prst="rect">
             <a:avLst/>
@@ -3682,56 +4008,76 @@
           <a:noFill/>
         </p:spPr>
         <p:txBody>
-          <a:bodyPr wrap="square">
+          <a:bodyPr wrap="none">
             <a:spAutoFit/>
           </a:bodyPr>
           <a:lstStyle/>
           <a:p>
             <a:pPr>
-              <a:defRPr sz="1800">
-                <a:solidFill>
-                  <a:srgbClr val="2C3E50"/>
+              <a:defRPr sz="1100">
+                <a:solidFill>
+                  <a:srgbClr val="1E2761"/>
                 </a:solidFill>
               </a:defRPr>
             </a:pPr>
             <a:r>
-              <a:t>Backend (Spring): JWT Validation, RBAC, Game Service</a:t>
-            </a:r>
-          </a:p>
-        </p:txBody>
-      </p:sp>
-      <p:sp>
-        <p:nvSpPr>
-          <p:cNvPr id="7" name="TextBox 6"/>
-          <p:cNvSpPr txBox="1"/>
-          <p:nvPr/>
-        </p:nvSpPr>
-        <p:spPr>
-          <a:xfrm>
-            <a:off x="914400" y="2880360"/>
-            <a:ext cx="7772400" cy="548640"/>
-          </a:xfrm>
-          <a:prstGeom prst="rect">
-            <a:avLst/>
-          </a:prstGeom>
-          <a:noFill/>
-        </p:spPr>
-        <p:txBody>
-          <a:bodyPr wrap="square">
-            <a:spAutoFit/>
-          </a:bodyPr>
-          <a:lstStyle/>
-          <a:p>
-            <a:pPr>
-              <a:defRPr sz="1800">
-                <a:solidFill>
-                  <a:srgbClr val="2C3E50"/>
-                </a:solidFill>
-              </a:defRPr>
-            </a:pPr>
-            <a:r>
-              <a:t>↓ Database Queries ↓</a:t>
-            </a:r>
+              <a:t>AuthContext</a:t>
+            </a:r>
+          </a:p>
+          <a:p>
+            <a:r>
+              <a:t>JWT Storage</a:t>
+            </a:r>
+          </a:p>
+          <a:p>
+            <a:r>
+              <a:t>Games UI</a:t>
+            </a:r>
+          </a:p>
+        </p:txBody>
+      </p:sp>
+      <p:sp>
+        <p:nvSpPr>
+          <p:cNvPr id="7" name="Rectangle 6"/>
+          <p:cNvSpPr/>
+          <p:nvPr/>
+        </p:nvSpPr>
+        <p:spPr>
+          <a:xfrm>
+            <a:off x="3200400" y="1371600"/>
+            <a:ext cx="2560320" cy="1645920"/>
+          </a:xfrm>
+          <a:prstGeom prst="rect">
+            <a:avLst/>
+          </a:prstGeom>
+          <a:solidFill>
+            <a:srgbClr val="CADCFC"/>
+          </a:solidFill>
+          <a:ln w="25400">
+            <a:solidFill>
+              <a:srgbClr val="1E2761"/>
+            </a:solidFill>
+          </a:ln>
+        </p:spPr>
+        <p:style>
+          <a:lnRef idx="1">
+            <a:schemeClr val="accent1"/>
+          </a:lnRef>
+          <a:fillRef idx="3">
+            <a:schemeClr val="accent1"/>
+          </a:fillRef>
+          <a:effectRef idx="2">
+            <a:schemeClr val="accent1"/>
+          </a:effectRef>
+          <a:fontRef idx="minor">
+            <a:schemeClr val="lt1"/>
+          </a:fontRef>
+        </p:style>
+        <p:txBody>
+          <a:bodyPr rtlCol="0" anchor="ctr"/>
+          <a:lstStyle/>
+          <a:p>
+            <a:pPr algn="ctr"/>
           </a:p>
         </p:txBody>
       </p:sp>
@@ -3743,8 +4089,8 @@
         </p:nvSpPr>
         <p:spPr>
           <a:xfrm>
-            <a:off x="914400" y="3474720"/>
-            <a:ext cx="7772400" cy="548640"/>
+            <a:off x="3291840" y="1508760"/>
+            <a:ext cx="2377440" cy="320040"/>
           </a:xfrm>
           <a:prstGeom prst="rect">
             <a:avLst/>
@@ -3752,20 +4098,190 @@
           <a:noFill/>
         </p:spPr>
         <p:txBody>
-          <a:bodyPr wrap="square">
+          <a:bodyPr wrap="none">
             <a:spAutoFit/>
           </a:bodyPr>
           <a:lstStyle/>
           <a:p>
             <a:pPr>
-              <a:defRPr sz="1800">
-                <a:solidFill>
-                  <a:srgbClr val="2C3E50"/>
+              <a:defRPr sz="1400" b="1">
+                <a:solidFill>
+                  <a:srgbClr val="1E2761"/>
                 </a:solidFill>
               </a:defRPr>
             </a:pPr>
             <a:r>
-              <a:t>MySQL: Users, Games, Roles</a:t>
+              <a:t>Spring Boot API</a:t>
+            </a:r>
+          </a:p>
+        </p:txBody>
+      </p:sp>
+      <p:sp>
+        <p:nvSpPr>
+          <p:cNvPr id="9" name="TextBox 8"/>
+          <p:cNvSpPr txBox="1"/>
+          <p:nvPr/>
+        </p:nvSpPr>
+        <p:spPr>
+          <a:xfrm>
+            <a:off x="3337560" y="1965960"/>
+            <a:ext cx="2286000" cy="914400"/>
+          </a:xfrm>
+          <a:prstGeom prst="rect">
+            <a:avLst/>
+          </a:prstGeom>
+          <a:noFill/>
+        </p:spPr>
+        <p:txBody>
+          <a:bodyPr wrap="none">
+            <a:spAutoFit/>
+          </a:bodyPr>
+          <a:lstStyle/>
+          <a:p>
+            <a:pPr>
+              <a:defRPr sz="1100">
+                <a:solidFill>
+                  <a:srgbClr val="1E2761"/>
+                </a:solidFill>
+              </a:defRPr>
+            </a:pPr>
+            <a:r>
+              <a:t>JWT Validation</a:t>
+            </a:r>
+          </a:p>
+          <a:p>
+            <a:r>
+              <a:t>RBAC</a:t>
+            </a:r>
+          </a:p>
+          <a:p>
+            <a:r>
+              <a:t>Game Service</a:t>
+            </a:r>
+          </a:p>
+        </p:txBody>
+      </p:sp>
+      <p:sp>
+        <p:nvSpPr>
+          <p:cNvPr id="10" name="Rectangle 9"/>
+          <p:cNvSpPr/>
+          <p:nvPr/>
+        </p:nvSpPr>
+        <p:spPr>
+          <a:xfrm>
+            <a:off x="5943600" y="1371600"/>
+            <a:ext cx="2560320" cy="1645920"/>
+          </a:xfrm>
+          <a:prstGeom prst="rect">
+            <a:avLst/>
+          </a:prstGeom>
+          <a:solidFill>
+            <a:srgbClr val="CADCFC"/>
+          </a:solidFill>
+          <a:ln w="25400">
+            <a:solidFill>
+              <a:srgbClr val="1E2761"/>
+            </a:solidFill>
+          </a:ln>
+        </p:spPr>
+        <p:style>
+          <a:lnRef idx="1">
+            <a:schemeClr val="accent1"/>
+          </a:lnRef>
+          <a:fillRef idx="3">
+            <a:schemeClr val="accent1"/>
+          </a:fillRef>
+          <a:effectRef idx="2">
+            <a:schemeClr val="accent1"/>
+          </a:effectRef>
+          <a:fontRef idx="minor">
+            <a:schemeClr val="lt1"/>
+          </a:fontRef>
+        </p:style>
+        <p:txBody>
+          <a:bodyPr rtlCol="0" anchor="ctr"/>
+          <a:lstStyle/>
+          <a:p>
+            <a:pPr algn="ctr"/>
+          </a:p>
+        </p:txBody>
+      </p:sp>
+      <p:sp>
+        <p:nvSpPr>
+          <p:cNvPr id="11" name="TextBox 10"/>
+          <p:cNvSpPr txBox="1"/>
+          <p:nvPr/>
+        </p:nvSpPr>
+        <p:spPr>
+          <a:xfrm>
+            <a:off x="6035040" y="1508760"/>
+            <a:ext cx="2377440" cy="320040"/>
+          </a:xfrm>
+          <a:prstGeom prst="rect">
+            <a:avLst/>
+          </a:prstGeom>
+          <a:noFill/>
+        </p:spPr>
+        <p:txBody>
+          <a:bodyPr wrap="none">
+            <a:spAutoFit/>
+          </a:bodyPr>
+          <a:lstStyle/>
+          <a:p>
+            <a:pPr>
+              <a:defRPr sz="1400" b="1">
+                <a:solidFill>
+                  <a:srgbClr val="1E2761"/>
+                </a:solidFill>
+              </a:defRPr>
+            </a:pPr>
+            <a:r>
+              <a:t>MySQL Database</a:t>
+            </a:r>
+          </a:p>
+        </p:txBody>
+      </p:sp>
+      <p:sp>
+        <p:nvSpPr>
+          <p:cNvPr id="12" name="TextBox 11"/>
+          <p:cNvSpPr txBox="1"/>
+          <p:nvPr/>
+        </p:nvSpPr>
+        <p:spPr>
+          <a:xfrm>
+            <a:off x="6080760" y="1965960"/>
+            <a:ext cx="2286000" cy="914400"/>
+          </a:xfrm>
+          <a:prstGeom prst="rect">
+            <a:avLst/>
+          </a:prstGeom>
+          <a:noFill/>
+        </p:spPr>
+        <p:txBody>
+          <a:bodyPr wrap="none">
+            <a:spAutoFit/>
+          </a:bodyPr>
+          <a:lstStyle/>
+          <a:p>
+            <a:pPr>
+              <a:defRPr sz="1100">
+                <a:solidFill>
+                  <a:srgbClr val="1E2761"/>
+                </a:solidFill>
+              </a:defRPr>
+            </a:pPr>
+            <a:r>
+              <a:t>Users</a:t>
+            </a:r>
+          </a:p>
+          <a:p>
+            <a:r>
+              <a:t>Games</a:t>
+            </a:r>
+          </a:p>
+          <a:p>
+            <a:r>
+              <a:t>Roles</a:t>
             </a:r>
           </a:p>
         </p:txBody>
@@ -3811,11 +4327,11 @@
             <a:avLst/>
           </a:prstGeom>
           <a:solidFill>
-            <a:srgbClr val="1E3A5F"/>
+            <a:srgbClr val="1E2761"/>
           </a:solidFill>
           <a:ln>
             <a:solidFill>
-              <a:srgbClr val="1E3A5F"/>
+              <a:srgbClr val="1E2761"/>
             </a:solidFill>
           </a:ln>
         </p:spPr>
@@ -3864,50 +4380,60 @@
           <a:lstStyle/>
           <a:p>
             <a:pPr>
-              <a:defRPr sz="3200" b="1">
+              <a:defRPr sz="3600" b="1">
                 <a:solidFill>
                   <a:srgbClr val="FFFFFF"/>
                 </a:solidFill>
               </a:defRPr>
             </a:pPr>
             <a:r>
-              <a:t>JWT Authentifizierung</a:t>
-            </a:r>
-          </a:p>
-        </p:txBody>
-      </p:sp>
-      <p:sp>
-        <p:nvSpPr>
-          <p:cNvPr id="4" name="TextBox 3"/>
-          <p:cNvSpPr txBox="1"/>
-          <p:nvPr/>
-        </p:nvSpPr>
-        <p:spPr>
-          <a:xfrm>
-            <a:off x="914400" y="1097280"/>
-            <a:ext cx="7772400" cy="548640"/>
-          </a:xfrm>
-          <a:prstGeom prst="rect">
-            <a:avLst/>
-          </a:prstGeom>
-          <a:noFill/>
-        </p:spPr>
-        <p:txBody>
-          <a:bodyPr wrap="square">
-            <a:spAutoFit/>
-          </a:bodyPr>
-          <a:lstStyle/>
-          <a:p>
-            <a:pPr>
-              <a:defRPr sz="1800">
-                <a:solidFill>
-                  <a:srgbClr val="2C3E50"/>
-                </a:solidFill>
-              </a:defRPr>
-            </a:pPr>
-            <a:r>
-              <a:t>1. Login → Token mit Rollen (ROLE_USER, ROLE_ADMIN)</a:t>
-            </a:r>
+              <a:t>JWT Authentication Flow</a:t>
+            </a:r>
+          </a:p>
+        </p:txBody>
+      </p:sp>
+      <p:sp>
+        <p:nvSpPr>
+          <p:cNvPr id="4" name="Rectangle 3"/>
+          <p:cNvSpPr/>
+          <p:nvPr/>
+        </p:nvSpPr>
+        <p:spPr>
+          <a:xfrm>
+            <a:off x="731520" y="1188720"/>
+            <a:ext cx="7680960" cy="411480"/>
+          </a:xfrm>
+          <a:prstGeom prst="rect">
+            <a:avLst/>
+          </a:prstGeom>
+          <a:solidFill>
+            <a:srgbClr val="90E0EF"/>
+          </a:solidFill>
+          <a:ln>
+            <a:solidFill>
+              <a:srgbClr val="90E0EF"/>
+            </a:solidFill>
+          </a:ln>
+        </p:spPr>
+        <p:style>
+          <a:lnRef idx="1">
+            <a:schemeClr val="accent1"/>
+          </a:lnRef>
+          <a:fillRef idx="3">
+            <a:schemeClr val="accent1"/>
+          </a:fillRef>
+          <a:effectRef idx="2">
+            <a:schemeClr val="accent1"/>
+          </a:effectRef>
+          <a:fontRef idx="minor">
+            <a:schemeClr val="lt1"/>
+          </a:fontRef>
+        </p:style>
+        <p:txBody>
+          <a:bodyPr rtlCol="0" anchor="ctr"/>
+          <a:lstStyle/>
+          <a:p>
+            <a:pPr algn="ctr"/>
           </a:p>
         </p:txBody>
       </p:sp>
@@ -3919,8 +4445,8 @@
         </p:nvSpPr>
         <p:spPr>
           <a:xfrm>
-            <a:off x="914400" y="1691640"/>
-            <a:ext cx="7772400" cy="548640"/>
+            <a:off x="914400" y="1234440"/>
+            <a:ext cx="7315200" cy="320040"/>
           </a:xfrm>
           <a:prstGeom prst="rect">
             <a:avLst/>
@@ -3928,20 +4454,20 @@
           <a:noFill/>
         </p:spPr>
         <p:txBody>
-          <a:bodyPr wrap="square">
+          <a:bodyPr wrap="none">
             <a:spAutoFit/>
           </a:bodyPr>
           <a:lstStyle/>
           <a:p>
             <a:pPr>
-              <a:defRPr sz="1800">
-                <a:solidFill>
-                  <a:srgbClr val="2C3E50"/>
+              <a:defRPr sz="1400" b="1">
+                <a:solidFill>
+                  <a:srgbClr val="1E2761"/>
                 </a:solidFill>
               </a:defRPr>
             </a:pPr>
             <a:r>
-              <a:t>2. Token im Authorization Header mitgesendet</a:t>
+              <a:t>1. Login Request</a:t>
             </a:r>
           </a:p>
         </p:txBody>
@@ -3954,8 +4480,8 @@
         </p:nvSpPr>
         <p:spPr>
           <a:xfrm>
-            <a:off x="914400" y="2286000"/>
-            <a:ext cx="7772400" cy="548640"/>
+            <a:off x="4114800" y="1645920"/>
+            <a:ext cx="914400" cy="274320"/>
           </a:xfrm>
           <a:prstGeom prst="rect">
             <a:avLst/>
@@ -3963,56 +4489,66 @@
           <a:noFill/>
         </p:spPr>
         <p:txBody>
-          <a:bodyPr wrap="square">
+          <a:bodyPr wrap="none">
             <a:spAutoFit/>
           </a:bodyPr>
           <a:lstStyle/>
           <a:p>
-            <a:pPr>
-              <a:defRPr sz="1800">
-                <a:solidFill>
-                  <a:srgbClr val="2C3E50"/>
+            <a:pPr algn="ctr">
+              <a:defRPr sz="1600">
+                <a:solidFill>
+                  <a:srgbClr val="00B4D8"/>
                 </a:solidFill>
               </a:defRPr>
             </a:pPr>
             <a:r>
-              <a:t>3. JwtAuthFilter validiert &amp; extrahiert Rollen</a:t>
-            </a:r>
-          </a:p>
-        </p:txBody>
-      </p:sp>
-      <p:sp>
-        <p:nvSpPr>
-          <p:cNvPr id="7" name="TextBox 6"/>
-          <p:cNvSpPr txBox="1"/>
-          <p:nvPr/>
-        </p:nvSpPr>
-        <p:spPr>
-          <a:xfrm>
-            <a:off x="914400" y="2880360"/>
-            <a:ext cx="7772400" cy="548640"/>
-          </a:xfrm>
-          <a:prstGeom prst="rect">
-            <a:avLst/>
-          </a:prstGeom>
-          <a:noFill/>
-        </p:spPr>
-        <p:txBody>
-          <a:bodyPr wrap="square">
-            <a:spAutoFit/>
-          </a:bodyPr>
-          <a:lstStyle/>
-          <a:p>
-            <a:pPr>
-              <a:defRPr sz="1800">
-                <a:solidFill>
-                  <a:srgbClr val="2C3E50"/>
-                </a:solidFill>
-              </a:defRPr>
-            </a:pPr>
-            <a:r>
-              <a:t>4. SecurityContext mit Authorities setzen</a:t>
-            </a:r>
+              <a:t>↓</a:t>
+            </a:r>
+          </a:p>
+        </p:txBody>
+      </p:sp>
+      <p:sp>
+        <p:nvSpPr>
+          <p:cNvPr id="7" name="Rectangle 6"/>
+          <p:cNvSpPr/>
+          <p:nvPr/>
+        </p:nvSpPr>
+        <p:spPr>
+          <a:xfrm>
+            <a:off x="731520" y="1691640"/>
+            <a:ext cx="7680960" cy="411480"/>
+          </a:xfrm>
+          <a:prstGeom prst="rect">
+            <a:avLst/>
+          </a:prstGeom>
+          <a:solidFill>
+            <a:srgbClr val="CADCFC"/>
+          </a:solidFill>
+          <a:ln>
+            <a:solidFill>
+              <a:srgbClr val="CADCFC"/>
+            </a:solidFill>
+          </a:ln>
+        </p:spPr>
+        <p:style>
+          <a:lnRef idx="1">
+            <a:schemeClr val="accent1"/>
+          </a:lnRef>
+          <a:fillRef idx="3">
+            <a:schemeClr val="accent1"/>
+          </a:fillRef>
+          <a:effectRef idx="2">
+            <a:schemeClr val="accent1"/>
+          </a:effectRef>
+          <a:fontRef idx="minor">
+            <a:schemeClr val="lt1"/>
+          </a:fontRef>
+        </p:style>
+        <p:txBody>
+          <a:bodyPr rtlCol="0" anchor="ctr"/>
+          <a:lstStyle/>
+          <a:p>
+            <a:pPr algn="ctr"/>
           </a:p>
         </p:txBody>
       </p:sp>
@@ -4024,8 +4560,8 @@
         </p:nvSpPr>
         <p:spPr>
           <a:xfrm>
-            <a:off x="914400" y="3474720"/>
-            <a:ext cx="7772400" cy="548640"/>
+            <a:off x="914400" y="1737360"/>
+            <a:ext cx="7315200" cy="320040"/>
           </a:xfrm>
           <a:prstGeom prst="rect">
             <a:avLst/>
@@ -4033,20 +4569,480 @@
           <a:noFill/>
         </p:spPr>
         <p:txBody>
-          <a:bodyPr wrap="square">
+          <a:bodyPr wrap="none">
             <a:spAutoFit/>
           </a:bodyPr>
           <a:lstStyle/>
           <a:p>
             <a:pPr>
-              <a:defRPr sz="1800">
-                <a:solidFill>
-                  <a:srgbClr val="2C3E50"/>
+              <a:defRPr sz="1400" b="1">
+                <a:solidFill>
+                  <a:srgbClr val="1E2761"/>
                 </a:solidFill>
               </a:defRPr>
             </a:pPr>
             <a:r>
-              <a:t>5. RBAC: POST/PUT/DELETE nur für ROLE_ADMIN</a:t>
+              <a:t>2. Verify Credentials</a:t>
+            </a:r>
+          </a:p>
+        </p:txBody>
+      </p:sp>
+      <p:sp>
+        <p:nvSpPr>
+          <p:cNvPr id="9" name="TextBox 8"/>
+          <p:cNvSpPr txBox="1"/>
+          <p:nvPr/>
+        </p:nvSpPr>
+        <p:spPr>
+          <a:xfrm>
+            <a:off x="4114800" y="2148840"/>
+            <a:ext cx="914400" cy="274320"/>
+          </a:xfrm>
+          <a:prstGeom prst="rect">
+            <a:avLst/>
+          </a:prstGeom>
+          <a:noFill/>
+        </p:spPr>
+        <p:txBody>
+          <a:bodyPr wrap="none">
+            <a:spAutoFit/>
+          </a:bodyPr>
+          <a:lstStyle/>
+          <a:p>
+            <a:pPr algn="ctr">
+              <a:defRPr sz="1600">
+                <a:solidFill>
+                  <a:srgbClr val="00B4D8"/>
+                </a:solidFill>
+              </a:defRPr>
+            </a:pPr>
+            <a:r>
+              <a:t>↓</a:t>
+            </a:r>
+          </a:p>
+        </p:txBody>
+      </p:sp>
+      <p:sp>
+        <p:nvSpPr>
+          <p:cNvPr id="10" name="Rectangle 9"/>
+          <p:cNvSpPr/>
+          <p:nvPr/>
+        </p:nvSpPr>
+        <p:spPr>
+          <a:xfrm>
+            <a:off x="731520" y="2194560"/>
+            <a:ext cx="7680960" cy="411480"/>
+          </a:xfrm>
+          <a:prstGeom prst="rect">
+            <a:avLst/>
+          </a:prstGeom>
+          <a:solidFill>
+            <a:srgbClr val="90E0EF"/>
+          </a:solidFill>
+          <a:ln>
+            <a:solidFill>
+              <a:srgbClr val="90E0EF"/>
+            </a:solidFill>
+          </a:ln>
+        </p:spPr>
+        <p:style>
+          <a:lnRef idx="1">
+            <a:schemeClr val="accent1"/>
+          </a:lnRef>
+          <a:fillRef idx="3">
+            <a:schemeClr val="accent1"/>
+          </a:fillRef>
+          <a:effectRef idx="2">
+            <a:schemeClr val="accent1"/>
+          </a:effectRef>
+          <a:fontRef idx="minor">
+            <a:schemeClr val="lt1"/>
+          </a:fontRef>
+        </p:style>
+        <p:txBody>
+          <a:bodyPr rtlCol="0" anchor="ctr"/>
+          <a:lstStyle/>
+          <a:p>
+            <a:pPr algn="ctr"/>
+          </a:p>
+        </p:txBody>
+      </p:sp>
+      <p:sp>
+        <p:nvSpPr>
+          <p:cNvPr id="11" name="TextBox 10"/>
+          <p:cNvSpPr txBox="1"/>
+          <p:nvPr/>
+        </p:nvSpPr>
+        <p:spPr>
+          <a:xfrm>
+            <a:off x="914400" y="2240280"/>
+            <a:ext cx="7315200" cy="320040"/>
+          </a:xfrm>
+          <a:prstGeom prst="rect">
+            <a:avLst/>
+          </a:prstGeom>
+          <a:noFill/>
+        </p:spPr>
+        <p:txBody>
+          <a:bodyPr wrap="none">
+            <a:spAutoFit/>
+          </a:bodyPr>
+          <a:lstStyle/>
+          <a:p>
+            <a:pPr>
+              <a:defRPr sz="1400" b="1">
+                <a:solidFill>
+                  <a:srgbClr val="1E2761"/>
+                </a:solidFill>
+              </a:defRPr>
+            </a:pPr>
+            <a:r>
+              <a:t>3. Generate JWT Token</a:t>
+            </a:r>
+          </a:p>
+        </p:txBody>
+      </p:sp>
+      <p:sp>
+        <p:nvSpPr>
+          <p:cNvPr id="12" name="TextBox 11"/>
+          <p:cNvSpPr txBox="1"/>
+          <p:nvPr/>
+        </p:nvSpPr>
+        <p:spPr>
+          <a:xfrm>
+            <a:off x="4114800" y="2651760"/>
+            <a:ext cx="914400" cy="274320"/>
+          </a:xfrm>
+          <a:prstGeom prst="rect">
+            <a:avLst/>
+          </a:prstGeom>
+          <a:noFill/>
+        </p:spPr>
+        <p:txBody>
+          <a:bodyPr wrap="none">
+            <a:spAutoFit/>
+          </a:bodyPr>
+          <a:lstStyle/>
+          <a:p>
+            <a:pPr algn="ctr">
+              <a:defRPr sz="1600">
+                <a:solidFill>
+                  <a:srgbClr val="00B4D8"/>
+                </a:solidFill>
+              </a:defRPr>
+            </a:pPr>
+            <a:r>
+              <a:t>↓</a:t>
+            </a:r>
+          </a:p>
+        </p:txBody>
+      </p:sp>
+      <p:sp>
+        <p:nvSpPr>
+          <p:cNvPr id="13" name="Rectangle 12"/>
+          <p:cNvSpPr/>
+          <p:nvPr/>
+        </p:nvSpPr>
+        <p:spPr>
+          <a:xfrm>
+            <a:off x="731520" y="2697480"/>
+            <a:ext cx="7680960" cy="411480"/>
+          </a:xfrm>
+          <a:prstGeom prst="rect">
+            <a:avLst/>
+          </a:prstGeom>
+          <a:solidFill>
+            <a:srgbClr val="CADCFC"/>
+          </a:solidFill>
+          <a:ln>
+            <a:solidFill>
+              <a:srgbClr val="CADCFC"/>
+            </a:solidFill>
+          </a:ln>
+        </p:spPr>
+        <p:style>
+          <a:lnRef idx="1">
+            <a:schemeClr val="accent1"/>
+          </a:lnRef>
+          <a:fillRef idx="3">
+            <a:schemeClr val="accent1"/>
+          </a:fillRef>
+          <a:effectRef idx="2">
+            <a:schemeClr val="accent1"/>
+          </a:effectRef>
+          <a:fontRef idx="minor">
+            <a:schemeClr val="lt1"/>
+          </a:fontRef>
+        </p:style>
+        <p:txBody>
+          <a:bodyPr rtlCol="0" anchor="ctr"/>
+          <a:lstStyle/>
+          <a:p>
+            <a:pPr algn="ctr"/>
+          </a:p>
+        </p:txBody>
+      </p:sp>
+      <p:sp>
+        <p:nvSpPr>
+          <p:cNvPr id="14" name="TextBox 13"/>
+          <p:cNvSpPr txBox="1"/>
+          <p:nvPr/>
+        </p:nvSpPr>
+        <p:spPr>
+          <a:xfrm>
+            <a:off x="914400" y="2743200"/>
+            <a:ext cx="7315200" cy="320040"/>
+          </a:xfrm>
+          <a:prstGeom prst="rect">
+            <a:avLst/>
+          </a:prstGeom>
+          <a:noFill/>
+        </p:spPr>
+        <p:txBody>
+          <a:bodyPr wrap="none">
+            <a:spAutoFit/>
+          </a:bodyPr>
+          <a:lstStyle/>
+          <a:p>
+            <a:pPr>
+              <a:defRPr sz="1400" b="1">
+                <a:solidFill>
+                  <a:srgbClr val="1E2761"/>
+                </a:solidFill>
+              </a:defRPr>
+            </a:pPr>
+            <a:r>
+              <a:t>4. Store in localStorage</a:t>
+            </a:r>
+          </a:p>
+        </p:txBody>
+      </p:sp>
+      <p:sp>
+        <p:nvSpPr>
+          <p:cNvPr id="15" name="TextBox 14"/>
+          <p:cNvSpPr txBox="1"/>
+          <p:nvPr/>
+        </p:nvSpPr>
+        <p:spPr>
+          <a:xfrm>
+            <a:off x="4114800" y="3154680"/>
+            <a:ext cx="914400" cy="274320"/>
+          </a:xfrm>
+          <a:prstGeom prst="rect">
+            <a:avLst/>
+          </a:prstGeom>
+          <a:noFill/>
+        </p:spPr>
+        <p:txBody>
+          <a:bodyPr wrap="none">
+            <a:spAutoFit/>
+          </a:bodyPr>
+          <a:lstStyle/>
+          <a:p>
+            <a:pPr algn="ctr">
+              <a:defRPr sz="1600">
+                <a:solidFill>
+                  <a:srgbClr val="00B4D8"/>
+                </a:solidFill>
+              </a:defRPr>
+            </a:pPr>
+            <a:r>
+              <a:t>↓</a:t>
+            </a:r>
+          </a:p>
+        </p:txBody>
+      </p:sp>
+      <p:sp>
+        <p:nvSpPr>
+          <p:cNvPr id="16" name="Rectangle 15"/>
+          <p:cNvSpPr/>
+          <p:nvPr/>
+        </p:nvSpPr>
+        <p:spPr>
+          <a:xfrm>
+            <a:off x="731520" y="3200400"/>
+            <a:ext cx="7680960" cy="411480"/>
+          </a:xfrm>
+          <a:prstGeom prst="rect">
+            <a:avLst/>
+          </a:prstGeom>
+          <a:solidFill>
+            <a:srgbClr val="90E0EF"/>
+          </a:solidFill>
+          <a:ln>
+            <a:solidFill>
+              <a:srgbClr val="90E0EF"/>
+            </a:solidFill>
+          </a:ln>
+        </p:spPr>
+        <p:style>
+          <a:lnRef idx="1">
+            <a:schemeClr val="accent1"/>
+          </a:lnRef>
+          <a:fillRef idx="3">
+            <a:schemeClr val="accent1"/>
+          </a:fillRef>
+          <a:effectRef idx="2">
+            <a:schemeClr val="accent1"/>
+          </a:effectRef>
+          <a:fontRef idx="minor">
+            <a:schemeClr val="lt1"/>
+          </a:fontRef>
+        </p:style>
+        <p:txBody>
+          <a:bodyPr rtlCol="0" anchor="ctr"/>
+          <a:lstStyle/>
+          <a:p>
+            <a:pPr algn="ctr"/>
+          </a:p>
+        </p:txBody>
+      </p:sp>
+      <p:sp>
+        <p:nvSpPr>
+          <p:cNvPr id="17" name="TextBox 16"/>
+          <p:cNvSpPr txBox="1"/>
+          <p:nvPr/>
+        </p:nvSpPr>
+        <p:spPr>
+          <a:xfrm>
+            <a:off x="914400" y="3246120"/>
+            <a:ext cx="7315200" cy="320040"/>
+          </a:xfrm>
+          <a:prstGeom prst="rect">
+            <a:avLst/>
+          </a:prstGeom>
+          <a:noFill/>
+        </p:spPr>
+        <p:txBody>
+          <a:bodyPr wrap="none">
+            <a:spAutoFit/>
+          </a:bodyPr>
+          <a:lstStyle/>
+          <a:p>
+            <a:pPr>
+              <a:defRPr sz="1400" b="1">
+                <a:solidFill>
+                  <a:srgbClr val="1E2761"/>
+                </a:solidFill>
+              </a:defRPr>
+            </a:pPr>
+            <a:r>
+              <a:t>5. Send Token in Header</a:t>
+            </a:r>
+          </a:p>
+        </p:txBody>
+      </p:sp>
+      <p:sp>
+        <p:nvSpPr>
+          <p:cNvPr id="18" name="TextBox 17"/>
+          <p:cNvSpPr txBox="1"/>
+          <p:nvPr/>
+        </p:nvSpPr>
+        <p:spPr>
+          <a:xfrm>
+            <a:off x="4114800" y="3657600"/>
+            <a:ext cx="914400" cy="274320"/>
+          </a:xfrm>
+          <a:prstGeom prst="rect">
+            <a:avLst/>
+          </a:prstGeom>
+          <a:noFill/>
+        </p:spPr>
+        <p:txBody>
+          <a:bodyPr wrap="none">
+            <a:spAutoFit/>
+          </a:bodyPr>
+          <a:lstStyle/>
+          <a:p>
+            <a:pPr algn="ctr">
+              <a:defRPr sz="1600">
+                <a:solidFill>
+                  <a:srgbClr val="00B4D8"/>
+                </a:solidFill>
+              </a:defRPr>
+            </a:pPr>
+            <a:r>
+              <a:t>↓</a:t>
+            </a:r>
+          </a:p>
+        </p:txBody>
+      </p:sp>
+      <p:sp>
+        <p:nvSpPr>
+          <p:cNvPr id="19" name="Rectangle 18"/>
+          <p:cNvSpPr/>
+          <p:nvPr/>
+        </p:nvSpPr>
+        <p:spPr>
+          <a:xfrm>
+            <a:off x="731520" y="3703320"/>
+            <a:ext cx="7680960" cy="411480"/>
+          </a:xfrm>
+          <a:prstGeom prst="rect">
+            <a:avLst/>
+          </a:prstGeom>
+          <a:solidFill>
+            <a:srgbClr val="CADCFC"/>
+          </a:solidFill>
+          <a:ln>
+            <a:solidFill>
+              <a:srgbClr val="CADCFC"/>
+            </a:solidFill>
+          </a:ln>
+        </p:spPr>
+        <p:style>
+          <a:lnRef idx="1">
+            <a:schemeClr val="accent1"/>
+          </a:lnRef>
+          <a:fillRef idx="3">
+            <a:schemeClr val="accent1"/>
+          </a:fillRef>
+          <a:effectRef idx="2">
+            <a:schemeClr val="accent1"/>
+          </a:effectRef>
+          <a:fontRef idx="minor">
+            <a:schemeClr val="lt1"/>
+          </a:fontRef>
+        </p:style>
+        <p:txBody>
+          <a:bodyPr rtlCol="0" anchor="ctr"/>
+          <a:lstStyle/>
+          <a:p>
+            <a:pPr algn="ctr"/>
+          </a:p>
+        </p:txBody>
+      </p:sp>
+      <p:sp>
+        <p:nvSpPr>
+          <p:cNvPr id="20" name="TextBox 19"/>
+          <p:cNvSpPr txBox="1"/>
+          <p:nvPr/>
+        </p:nvSpPr>
+        <p:spPr>
+          <a:xfrm>
+            <a:off x="914400" y="3749039"/>
+            <a:ext cx="7315200" cy="320040"/>
+          </a:xfrm>
+          <a:prstGeom prst="rect">
+            <a:avLst/>
+          </a:prstGeom>
+          <a:noFill/>
+        </p:spPr>
+        <p:txBody>
+          <a:bodyPr wrap="none">
+            <a:spAutoFit/>
+          </a:bodyPr>
+          <a:lstStyle/>
+          <a:p>
+            <a:pPr>
+              <a:defRPr sz="1400" b="1">
+                <a:solidFill>
+                  <a:srgbClr val="1E2761"/>
+                </a:solidFill>
+              </a:defRPr>
+            </a:pPr>
+            <a:r>
+              <a:t>6. Validate &amp; Extract Roles</a:t>
             </a:r>
           </a:p>
         </p:txBody>
@@ -4092,11 +5088,11 @@
             <a:avLst/>
           </a:prstGeom>
           <a:solidFill>
-            <a:srgbClr val="1E3A5F"/>
+            <a:srgbClr val="1E2761"/>
           </a:solidFill>
           <a:ln>
             <a:solidFill>
-              <a:srgbClr val="1E3A5F"/>
+              <a:srgbClr val="1E2761"/>
             </a:solidFill>
           </a:ln>
         </p:spPr>
@@ -4145,7 +5141,7 @@
           <a:lstStyle/>
           <a:p>
             <a:pPr>
-              <a:defRPr sz="3200" b="1">
+              <a:defRPr sz="3600" b="1">
                 <a:solidFill>
                   <a:srgbClr val="FFFFFF"/>
                 </a:solidFill>
@@ -4159,36 +5155,46 @@
       </p:sp>
       <p:sp>
         <p:nvSpPr>
-          <p:cNvPr id="4" name="TextBox 3"/>
-          <p:cNvSpPr txBox="1"/>
-          <p:nvPr/>
-        </p:nvSpPr>
-        <p:spPr>
-          <a:xfrm>
-            <a:off x="914400" y="1097280"/>
-            <a:ext cx="7772400" cy="548640"/>
-          </a:xfrm>
-          <a:prstGeom prst="rect">
-            <a:avLst/>
-          </a:prstGeom>
-          <a:noFill/>
-        </p:spPr>
-        <p:txBody>
-          <a:bodyPr wrap="square">
-            <a:spAutoFit/>
-          </a:bodyPr>
-          <a:lstStyle/>
-          <a:p>
-            <a:pPr>
-              <a:defRPr sz="1800">
-                <a:solidFill>
-                  <a:srgbClr val="2C3E50"/>
-                </a:solidFill>
-              </a:defRPr>
-            </a:pPr>
-            <a:r>
-              <a:t>GET /api/games → USER, ADMIN</a:t>
-            </a:r>
+          <p:cNvPr id="4" name="Rectangle 3"/>
+          <p:cNvSpPr/>
+          <p:nvPr/>
+        </p:nvSpPr>
+        <p:spPr>
+          <a:xfrm>
+            <a:off x="914400" y="1188720"/>
+            <a:ext cx="2377440" cy="457200"/>
+          </a:xfrm>
+          <a:prstGeom prst="rect">
+            <a:avLst/>
+          </a:prstGeom>
+          <a:solidFill>
+            <a:srgbClr val="1E2761"/>
+          </a:solidFill>
+          <a:ln w="12700">
+            <a:solidFill>
+              <a:srgbClr val="1E2761"/>
+            </a:solidFill>
+          </a:ln>
+        </p:spPr>
+        <p:style>
+          <a:lnRef idx="1">
+            <a:schemeClr val="accent1"/>
+          </a:lnRef>
+          <a:fillRef idx="3">
+            <a:schemeClr val="accent1"/>
+          </a:fillRef>
+          <a:effectRef idx="2">
+            <a:schemeClr val="accent1"/>
+          </a:effectRef>
+          <a:fontRef idx="minor">
+            <a:schemeClr val="lt1"/>
+          </a:fontRef>
+        </p:style>
+        <p:txBody>
+          <a:bodyPr rtlCol="0" anchor="ctr"/>
+          <a:lstStyle/>
+          <a:p>
+            <a:pPr algn="ctr"/>
           </a:p>
         </p:txBody>
       </p:sp>
@@ -4200,8 +5206,8 @@
         </p:nvSpPr>
         <p:spPr>
           <a:xfrm>
-            <a:off x="914400" y="1691640"/>
-            <a:ext cx="7772400" cy="548640"/>
+            <a:off x="1005840" y="1234440"/>
+            <a:ext cx="2194560" cy="365760"/>
           </a:xfrm>
           <a:prstGeom prst="rect">
             <a:avLst/>
@@ -4209,56 +5215,66 @@
           <a:noFill/>
         </p:spPr>
         <p:txBody>
-          <a:bodyPr wrap="square">
+          <a:bodyPr wrap="none">
             <a:spAutoFit/>
           </a:bodyPr>
           <a:lstStyle/>
           <a:p>
-            <a:pPr>
-              <a:defRPr sz="1800">
-                <a:solidFill>
-                  <a:srgbClr val="2C3E50"/>
+            <a:pPr algn="ctr">
+              <a:defRPr sz="1400" b="1">
+                <a:solidFill>
+                  <a:srgbClr val="FFFFFF"/>
                 </a:solidFill>
               </a:defRPr>
             </a:pPr>
             <a:r>
-              <a:t>POST /api/games → ADMIN ✓</a:t>
-            </a:r>
-          </a:p>
-        </p:txBody>
-      </p:sp>
-      <p:sp>
-        <p:nvSpPr>
-          <p:cNvPr id="6" name="TextBox 5"/>
-          <p:cNvSpPr txBox="1"/>
-          <p:nvPr/>
-        </p:nvSpPr>
-        <p:spPr>
-          <a:xfrm>
-            <a:off x="914400" y="2286000"/>
-            <a:ext cx="7772400" cy="548640"/>
-          </a:xfrm>
-          <a:prstGeom prst="rect">
-            <a:avLst/>
-          </a:prstGeom>
-          <a:noFill/>
-        </p:spPr>
-        <p:txBody>
-          <a:bodyPr wrap="square">
-            <a:spAutoFit/>
-          </a:bodyPr>
-          <a:lstStyle/>
-          <a:p>
-            <a:pPr>
-              <a:defRPr sz="1800">
-                <a:solidFill>
-                  <a:srgbClr val="2C3E50"/>
-                </a:solidFill>
-              </a:defRPr>
-            </a:pPr>
-            <a:r>
-              <a:t>PUT /api/games/:id → ADMIN ✓</a:t>
-            </a:r>
+              <a:t>Operation</a:t>
+            </a:r>
+          </a:p>
+        </p:txBody>
+      </p:sp>
+      <p:sp>
+        <p:nvSpPr>
+          <p:cNvPr id="6" name="Rectangle 5"/>
+          <p:cNvSpPr/>
+          <p:nvPr/>
+        </p:nvSpPr>
+        <p:spPr>
+          <a:xfrm>
+            <a:off x="3474720" y="1188720"/>
+            <a:ext cx="2377440" cy="457200"/>
+          </a:xfrm>
+          <a:prstGeom prst="rect">
+            <a:avLst/>
+          </a:prstGeom>
+          <a:solidFill>
+            <a:srgbClr val="1E2761"/>
+          </a:solidFill>
+          <a:ln w="12700">
+            <a:solidFill>
+              <a:srgbClr val="1E2761"/>
+            </a:solidFill>
+          </a:ln>
+        </p:spPr>
+        <p:style>
+          <a:lnRef idx="1">
+            <a:schemeClr val="accent1"/>
+          </a:lnRef>
+          <a:fillRef idx="3">
+            <a:schemeClr val="accent1"/>
+          </a:fillRef>
+          <a:effectRef idx="2">
+            <a:schemeClr val="accent1"/>
+          </a:effectRef>
+          <a:fontRef idx="minor">
+            <a:schemeClr val="lt1"/>
+          </a:fontRef>
+        </p:style>
+        <p:txBody>
+          <a:bodyPr rtlCol="0" anchor="ctr"/>
+          <a:lstStyle/>
+          <a:p>
+            <a:pPr algn="ctr"/>
           </a:p>
         </p:txBody>
       </p:sp>
@@ -4270,8 +5286,8 @@
         </p:nvSpPr>
         <p:spPr>
           <a:xfrm>
-            <a:off x="914400" y="2880360"/>
-            <a:ext cx="7772400" cy="548640"/>
+            <a:off x="3566160" y="1234440"/>
+            <a:ext cx="2194560" cy="365760"/>
           </a:xfrm>
           <a:prstGeom prst="rect">
             <a:avLst/>
@@ -4279,34 +5295,79 @@
           <a:noFill/>
         </p:spPr>
         <p:txBody>
-          <a:bodyPr wrap="square">
+          <a:bodyPr wrap="none">
             <a:spAutoFit/>
           </a:bodyPr>
           <a:lstStyle/>
           <a:p>
-            <a:pPr>
-              <a:defRPr sz="1800">
-                <a:solidFill>
-                  <a:srgbClr val="2C3E50"/>
+            <a:pPr algn="ctr">
+              <a:defRPr sz="1400" b="1">
+                <a:solidFill>
+                  <a:srgbClr val="FFFFFF"/>
                 </a:solidFill>
               </a:defRPr>
             </a:pPr>
             <a:r>
-              <a:t>DELETE /api/games/:id → ADMIN ✓</a:t>
-            </a:r>
-          </a:p>
-        </p:txBody>
-      </p:sp>
-      <p:sp>
-        <p:nvSpPr>
-          <p:cNvPr id="8" name="TextBox 7"/>
+              <a:t>ROLE_USER</a:t>
+            </a:r>
+          </a:p>
+        </p:txBody>
+      </p:sp>
+      <p:sp>
+        <p:nvSpPr>
+          <p:cNvPr id="8" name="Rectangle 7"/>
+          <p:cNvSpPr/>
+          <p:nvPr/>
+        </p:nvSpPr>
+        <p:spPr>
+          <a:xfrm>
+            <a:off x="6035040" y="1188720"/>
+            <a:ext cx="2377440" cy="457200"/>
+          </a:xfrm>
+          <a:prstGeom prst="rect">
+            <a:avLst/>
+          </a:prstGeom>
+          <a:solidFill>
+            <a:srgbClr val="1E2761"/>
+          </a:solidFill>
+          <a:ln w="12700">
+            <a:solidFill>
+              <a:srgbClr val="1E2761"/>
+            </a:solidFill>
+          </a:ln>
+        </p:spPr>
+        <p:style>
+          <a:lnRef idx="1">
+            <a:schemeClr val="accent1"/>
+          </a:lnRef>
+          <a:fillRef idx="3">
+            <a:schemeClr val="accent1"/>
+          </a:fillRef>
+          <a:effectRef idx="2">
+            <a:schemeClr val="accent1"/>
+          </a:effectRef>
+          <a:fontRef idx="minor">
+            <a:schemeClr val="lt1"/>
+          </a:fontRef>
+        </p:style>
+        <p:txBody>
+          <a:bodyPr rtlCol="0" anchor="ctr"/>
+          <a:lstStyle/>
+          <a:p>
+            <a:pPr algn="ctr"/>
+          </a:p>
+        </p:txBody>
+      </p:sp>
+      <p:sp>
+        <p:nvSpPr>
+          <p:cNvPr id="9" name="TextBox 8"/>
           <p:cNvSpPr txBox="1"/>
           <p:nvPr/>
         </p:nvSpPr>
         <p:spPr>
           <a:xfrm>
-            <a:off x="914400" y="3474720"/>
-            <a:ext cx="7772400" cy="548640"/>
+            <a:off x="6126479" y="1234440"/>
+            <a:ext cx="2194560" cy="365760"/>
           </a:xfrm>
           <a:prstGeom prst="rect">
             <a:avLst/>
@@ -4314,20 +5375,980 @@
           <a:noFill/>
         </p:spPr>
         <p:txBody>
-          <a:bodyPr wrap="square">
+          <a:bodyPr wrap="none">
             <a:spAutoFit/>
           </a:bodyPr>
           <a:lstStyle/>
           <a:p>
-            <a:pPr>
-              <a:defRPr sz="1800">
-                <a:solidFill>
-                  <a:srgbClr val="2C3E50"/>
+            <a:pPr algn="ctr">
+              <a:defRPr sz="1400" b="1">
+                <a:solidFill>
+                  <a:srgbClr val="FFFFFF"/>
                 </a:solidFill>
               </a:defRPr>
             </a:pPr>
             <a:r>
-              <a:t>Sichere Endpoints mit Spring Security</a:t>
+              <a:t>ROLE_ADMIN</a:t>
+            </a:r>
+          </a:p>
+        </p:txBody>
+      </p:sp>
+      <p:sp>
+        <p:nvSpPr>
+          <p:cNvPr id="10" name="Rectangle 9"/>
+          <p:cNvSpPr/>
+          <p:nvPr/>
+        </p:nvSpPr>
+        <p:spPr>
+          <a:xfrm>
+            <a:off x="914400" y="1737360"/>
+            <a:ext cx="2377440" cy="457200"/>
+          </a:xfrm>
+          <a:prstGeom prst="rect">
+            <a:avLst/>
+          </a:prstGeom>
+          <a:solidFill>
+            <a:srgbClr val="CADCFC"/>
+          </a:solidFill>
+          <a:ln w="12700">
+            <a:solidFill>
+              <a:srgbClr val="1E2761"/>
+            </a:solidFill>
+          </a:ln>
+        </p:spPr>
+        <p:style>
+          <a:lnRef idx="1">
+            <a:schemeClr val="accent1"/>
+          </a:lnRef>
+          <a:fillRef idx="3">
+            <a:schemeClr val="accent1"/>
+          </a:fillRef>
+          <a:effectRef idx="2">
+            <a:schemeClr val="accent1"/>
+          </a:effectRef>
+          <a:fontRef idx="minor">
+            <a:schemeClr val="lt1"/>
+          </a:fontRef>
+        </p:style>
+        <p:txBody>
+          <a:bodyPr rtlCol="0" anchor="ctr"/>
+          <a:lstStyle/>
+          <a:p>
+            <a:pPr algn="ctr"/>
+          </a:p>
+        </p:txBody>
+      </p:sp>
+      <p:sp>
+        <p:nvSpPr>
+          <p:cNvPr id="11" name="TextBox 10"/>
+          <p:cNvSpPr txBox="1"/>
+          <p:nvPr/>
+        </p:nvSpPr>
+        <p:spPr>
+          <a:xfrm>
+            <a:off x="1005840" y="1783080"/>
+            <a:ext cx="2194560" cy="365760"/>
+          </a:xfrm>
+          <a:prstGeom prst="rect">
+            <a:avLst/>
+          </a:prstGeom>
+          <a:noFill/>
+        </p:spPr>
+        <p:txBody>
+          <a:bodyPr wrap="none">
+            <a:spAutoFit/>
+          </a:bodyPr>
+          <a:lstStyle/>
+          <a:p>
+            <a:pPr algn="ctr">
+              <a:defRPr sz="1400">
+                <a:solidFill>
+                  <a:srgbClr val="1E2761"/>
+                </a:solidFill>
+              </a:defRPr>
+            </a:pPr>
+            <a:r>
+              <a:t>GET /games</a:t>
+            </a:r>
+          </a:p>
+        </p:txBody>
+      </p:sp>
+      <p:sp>
+        <p:nvSpPr>
+          <p:cNvPr id="12" name="Rectangle 11"/>
+          <p:cNvSpPr/>
+          <p:nvPr/>
+        </p:nvSpPr>
+        <p:spPr>
+          <a:xfrm>
+            <a:off x="3474720" y="1737360"/>
+            <a:ext cx="2377440" cy="457200"/>
+          </a:xfrm>
+          <a:prstGeom prst="rect">
+            <a:avLst/>
+          </a:prstGeom>
+          <a:solidFill>
+            <a:srgbClr val="90E0EF"/>
+          </a:solidFill>
+          <a:ln w="12700">
+            <a:solidFill>
+              <a:srgbClr val="1E2761"/>
+            </a:solidFill>
+          </a:ln>
+        </p:spPr>
+        <p:style>
+          <a:lnRef idx="1">
+            <a:schemeClr val="accent1"/>
+          </a:lnRef>
+          <a:fillRef idx="3">
+            <a:schemeClr val="accent1"/>
+          </a:fillRef>
+          <a:effectRef idx="2">
+            <a:schemeClr val="accent1"/>
+          </a:effectRef>
+          <a:fontRef idx="minor">
+            <a:schemeClr val="lt1"/>
+          </a:fontRef>
+        </p:style>
+        <p:txBody>
+          <a:bodyPr rtlCol="0" anchor="ctr"/>
+          <a:lstStyle/>
+          <a:p>
+            <a:pPr algn="ctr"/>
+          </a:p>
+        </p:txBody>
+      </p:sp>
+      <p:sp>
+        <p:nvSpPr>
+          <p:cNvPr id="13" name="TextBox 12"/>
+          <p:cNvSpPr txBox="1"/>
+          <p:nvPr/>
+        </p:nvSpPr>
+        <p:spPr>
+          <a:xfrm>
+            <a:off x="3566160" y="1783080"/>
+            <a:ext cx="2194560" cy="365760"/>
+          </a:xfrm>
+          <a:prstGeom prst="rect">
+            <a:avLst/>
+          </a:prstGeom>
+          <a:noFill/>
+        </p:spPr>
+        <p:txBody>
+          <a:bodyPr wrap="none">
+            <a:spAutoFit/>
+          </a:bodyPr>
+          <a:lstStyle/>
+          <a:p>
+            <a:pPr algn="ctr">
+              <a:defRPr sz="1400">
+                <a:solidFill>
+                  <a:srgbClr val="1E2761"/>
+                </a:solidFill>
+              </a:defRPr>
+            </a:pPr>
+            <a:r>
+              <a:t>✓</a:t>
+            </a:r>
+          </a:p>
+        </p:txBody>
+      </p:sp>
+      <p:sp>
+        <p:nvSpPr>
+          <p:cNvPr id="14" name="Rectangle 13"/>
+          <p:cNvSpPr/>
+          <p:nvPr/>
+        </p:nvSpPr>
+        <p:spPr>
+          <a:xfrm>
+            <a:off x="6035040" y="1737360"/>
+            <a:ext cx="2377440" cy="457200"/>
+          </a:xfrm>
+          <a:prstGeom prst="rect">
+            <a:avLst/>
+          </a:prstGeom>
+          <a:solidFill>
+            <a:srgbClr val="90E0EF"/>
+          </a:solidFill>
+          <a:ln w="12700">
+            <a:solidFill>
+              <a:srgbClr val="1E2761"/>
+            </a:solidFill>
+          </a:ln>
+        </p:spPr>
+        <p:style>
+          <a:lnRef idx="1">
+            <a:schemeClr val="accent1"/>
+          </a:lnRef>
+          <a:fillRef idx="3">
+            <a:schemeClr val="accent1"/>
+          </a:fillRef>
+          <a:effectRef idx="2">
+            <a:schemeClr val="accent1"/>
+          </a:effectRef>
+          <a:fontRef idx="minor">
+            <a:schemeClr val="lt1"/>
+          </a:fontRef>
+        </p:style>
+        <p:txBody>
+          <a:bodyPr rtlCol="0" anchor="ctr"/>
+          <a:lstStyle/>
+          <a:p>
+            <a:pPr algn="ctr"/>
+          </a:p>
+        </p:txBody>
+      </p:sp>
+      <p:sp>
+        <p:nvSpPr>
+          <p:cNvPr id="15" name="TextBox 14"/>
+          <p:cNvSpPr txBox="1"/>
+          <p:nvPr/>
+        </p:nvSpPr>
+        <p:spPr>
+          <a:xfrm>
+            <a:off x="6126479" y="1783080"/>
+            <a:ext cx="2194560" cy="365760"/>
+          </a:xfrm>
+          <a:prstGeom prst="rect">
+            <a:avLst/>
+          </a:prstGeom>
+          <a:noFill/>
+        </p:spPr>
+        <p:txBody>
+          <a:bodyPr wrap="none">
+            <a:spAutoFit/>
+          </a:bodyPr>
+          <a:lstStyle/>
+          <a:p>
+            <a:pPr algn="ctr">
+              <a:defRPr sz="1400">
+                <a:solidFill>
+                  <a:srgbClr val="1E2761"/>
+                </a:solidFill>
+              </a:defRPr>
+            </a:pPr>
+            <a:r>
+              <a:t>✓</a:t>
+            </a:r>
+          </a:p>
+        </p:txBody>
+      </p:sp>
+      <p:sp>
+        <p:nvSpPr>
+          <p:cNvPr id="16" name="Rectangle 15"/>
+          <p:cNvSpPr/>
+          <p:nvPr/>
+        </p:nvSpPr>
+        <p:spPr>
+          <a:xfrm>
+            <a:off x="914400" y="2286000"/>
+            <a:ext cx="2377440" cy="457200"/>
+          </a:xfrm>
+          <a:prstGeom prst="rect">
+            <a:avLst/>
+          </a:prstGeom>
+          <a:solidFill>
+            <a:srgbClr val="CADCFC"/>
+          </a:solidFill>
+          <a:ln w="12700">
+            <a:solidFill>
+              <a:srgbClr val="1E2761"/>
+            </a:solidFill>
+          </a:ln>
+        </p:spPr>
+        <p:style>
+          <a:lnRef idx="1">
+            <a:schemeClr val="accent1"/>
+          </a:lnRef>
+          <a:fillRef idx="3">
+            <a:schemeClr val="accent1"/>
+          </a:fillRef>
+          <a:effectRef idx="2">
+            <a:schemeClr val="accent1"/>
+          </a:effectRef>
+          <a:fontRef idx="minor">
+            <a:schemeClr val="lt1"/>
+          </a:fontRef>
+        </p:style>
+        <p:txBody>
+          <a:bodyPr rtlCol="0" anchor="ctr"/>
+          <a:lstStyle/>
+          <a:p>
+            <a:pPr algn="ctr"/>
+          </a:p>
+        </p:txBody>
+      </p:sp>
+      <p:sp>
+        <p:nvSpPr>
+          <p:cNvPr id="17" name="TextBox 16"/>
+          <p:cNvSpPr txBox="1"/>
+          <p:nvPr/>
+        </p:nvSpPr>
+        <p:spPr>
+          <a:xfrm>
+            <a:off x="1005840" y="2331720"/>
+            <a:ext cx="2194560" cy="365760"/>
+          </a:xfrm>
+          <a:prstGeom prst="rect">
+            <a:avLst/>
+          </a:prstGeom>
+          <a:noFill/>
+        </p:spPr>
+        <p:txBody>
+          <a:bodyPr wrap="none">
+            <a:spAutoFit/>
+          </a:bodyPr>
+          <a:lstStyle/>
+          <a:p>
+            <a:pPr algn="ctr">
+              <a:defRPr sz="1400">
+                <a:solidFill>
+                  <a:srgbClr val="1E2761"/>
+                </a:solidFill>
+              </a:defRPr>
+            </a:pPr>
+            <a:r>
+              <a:t>POST /games</a:t>
+            </a:r>
+          </a:p>
+        </p:txBody>
+      </p:sp>
+      <p:sp>
+        <p:nvSpPr>
+          <p:cNvPr id="18" name="Rectangle 17"/>
+          <p:cNvSpPr/>
+          <p:nvPr/>
+        </p:nvSpPr>
+        <p:spPr>
+          <a:xfrm>
+            <a:off x="3474720" y="2286000"/>
+            <a:ext cx="2377440" cy="457200"/>
+          </a:xfrm>
+          <a:prstGeom prst="rect">
+            <a:avLst/>
+          </a:prstGeom>
+          <a:solidFill>
+            <a:srgbClr val="FFFFFF"/>
+          </a:solidFill>
+          <a:ln w="12700">
+            <a:solidFill>
+              <a:srgbClr val="1E2761"/>
+            </a:solidFill>
+          </a:ln>
+        </p:spPr>
+        <p:style>
+          <a:lnRef idx="1">
+            <a:schemeClr val="accent1"/>
+          </a:lnRef>
+          <a:fillRef idx="3">
+            <a:schemeClr val="accent1"/>
+          </a:fillRef>
+          <a:effectRef idx="2">
+            <a:schemeClr val="accent1"/>
+          </a:effectRef>
+          <a:fontRef idx="minor">
+            <a:schemeClr val="lt1"/>
+          </a:fontRef>
+        </p:style>
+        <p:txBody>
+          <a:bodyPr rtlCol="0" anchor="ctr"/>
+          <a:lstStyle/>
+          <a:p>
+            <a:pPr algn="ctr"/>
+          </a:p>
+        </p:txBody>
+      </p:sp>
+      <p:sp>
+        <p:nvSpPr>
+          <p:cNvPr id="19" name="TextBox 18"/>
+          <p:cNvSpPr txBox="1"/>
+          <p:nvPr/>
+        </p:nvSpPr>
+        <p:spPr>
+          <a:xfrm>
+            <a:off x="3566160" y="2331720"/>
+            <a:ext cx="2194560" cy="365760"/>
+          </a:xfrm>
+          <a:prstGeom prst="rect">
+            <a:avLst/>
+          </a:prstGeom>
+          <a:noFill/>
+        </p:spPr>
+        <p:txBody>
+          <a:bodyPr wrap="none">
+            <a:spAutoFit/>
+          </a:bodyPr>
+          <a:lstStyle/>
+          <a:p>
+            <a:pPr algn="ctr">
+              <a:defRPr sz="1400">
+                <a:solidFill>
+                  <a:srgbClr val="1E2761"/>
+                </a:solidFill>
+              </a:defRPr>
+            </a:pPr>
+            <a:r>
+              <a:t>✗</a:t>
+            </a:r>
+          </a:p>
+        </p:txBody>
+      </p:sp>
+      <p:sp>
+        <p:nvSpPr>
+          <p:cNvPr id="20" name="Rectangle 19"/>
+          <p:cNvSpPr/>
+          <p:nvPr/>
+        </p:nvSpPr>
+        <p:spPr>
+          <a:xfrm>
+            <a:off x="6035040" y="2286000"/>
+            <a:ext cx="2377440" cy="457200"/>
+          </a:xfrm>
+          <a:prstGeom prst="rect">
+            <a:avLst/>
+          </a:prstGeom>
+          <a:solidFill>
+            <a:srgbClr val="90E0EF"/>
+          </a:solidFill>
+          <a:ln w="12700">
+            <a:solidFill>
+              <a:srgbClr val="1E2761"/>
+            </a:solidFill>
+          </a:ln>
+        </p:spPr>
+        <p:style>
+          <a:lnRef idx="1">
+            <a:schemeClr val="accent1"/>
+          </a:lnRef>
+          <a:fillRef idx="3">
+            <a:schemeClr val="accent1"/>
+          </a:fillRef>
+          <a:effectRef idx="2">
+            <a:schemeClr val="accent1"/>
+          </a:effectRef>
+          <a:fontRef idx="minor">
+            <a:schemeClr val="lt1"/>
+          </a:fontRef>
+        </p:style>
+        <p:txBody>
+          <a:bodyPr rtlCol="0" anchor="ctr"/>
+          <a:lstStyle/>
+          <a:p>
+            <a:pPr algn="ctr"/>
+          </a:p>
+        </p:txBody>
+      </p:sp>
+      <p:sp>
+        <p:nvSpPr>
+          <p:cNvPr id="21" name="TextBox 20"/>
+          <p:cNvSpPr txBox="1"/>
+          <p:nvPr/>
+        </p:nvSpPr>
+        <p:spPr>
+          <a:xfrm>
+            <a:off x="6126479" y="2331720"/>
+            <a:ext cx="2194560" cy="365760"/>
+          </a:xfrm>
+          <a:prstGeom prst="rect">
+            <a:avLst/>
+          </a:prstGeom>
+          <a:noFill/>
+        </p:spPr>
+        <p:txBody>
+          <a:bodyPr wrap="none">
+            <a:spAutoFit/>
+          </a:bodyPr>
+          <a:lstStyle/>
+          <a:p>
+            <a:pPr algn="ctr">
+              <a:defRPr sz="1400">
+                <a:solidFill>
+                  <a:srgbClr val="1E2761"/>
+                </a:solidFill>
+              </a:defRPr>
+            </a:pPr>
+            <a:r>
+              <a:t>✓</a:t>
+            </a:r>
+          </a:p>
+        </p:txBody>
+      </p:sp>
+      <p:sp>
+        <p:nvSpPr>
+          <p:cNvPr id="22" name="Rectangle 21"/>
+          <p:cNvSpPr/>
+          <p:nvPr/>
+        </p:nvSpPr>
+        <p:spPr>
+          <a:xfrm>
+            <a:off x="914400" y="2834639"/>
+            <a:ext cx="2377440" cy="457200"/>
+          </a:xfrm>
+          <a:prstGeom prst="rect">
+            <a:avLst/>
+          </a:prstGeom>
+          <a:solidFill>
+            <a:srgbClr val="CADCFC"/>
+          </a:solidFill>
+          <a:ln w="12700">
+            <a:solidFill>
+              <a:srgbClr val="1E2761"/>
+            </a:solidFill>
+          </a:ln>
+        </p:spPr>
+        <p:style>
+          <a:lnRef idx="1">
+            <a:schemeClr val="accent1"/>
+          </a:lnRef>
+          <a:fillRef idx="3">
+            <a:schemeClr val="accent1"/>
+          </a:fillRef>
+          <a:effectRef idx="2">
+            <a:schemeClr val="accent1"/>
+          </a:effectRef>
+          <a:fontRef idx="minor">
+            <a:schemeClr val="lt1"/>
+          </a:fontRef>
+        </p:style>
+        <p:txBody>
+          <a:bodyPr rtlCol="0" anchor="ctr"/>
+          <a:lstStyle/>
+          <a:p>
+            <a:pPr algn="ctr"/>
+          </a:p>
+        </p:txBody>
+      </p:sp>
+      <p:sp>
+        <p:nvSpPr>
+          <p:cNvPr id="23" name="TextBox 22"/>
+          <p:cNvSpPr txBox="1"/>
+          <p:nvPr/>
+        </p:nvSpPr>
+        <p:spPr>
+          <a:xfrm>
+            <a:off x="1005840" y="2880359"/>
+            <a:ext cx="2194560" cy="365760"/>
+          </a:xfrm>
+          <a:prstGeom prst="rect">
+            <a:avLst/>
+          </a:prstGeom>
+          <a:noFill/>
+        </p:spPr>
+        <p:txBody>
+          <a:bodyPr wrap="none">
+            <a:spAutoFit/>
+          </a:bodyPr>
+          <a:lstStyle/>
+          <a:p>
+            <a:pPr algn="ctr">
+              <a:defRPr sz="1400">
+                <a:solidFill>
+                  <a:srgbClr val="1E2761"/>
+                </a:solidFill>
+              </a:defRPr>
+            </a:pPr>
+            <a:r>
+              <a:t>PUT /games/:id</a:t>
+            </a:r>
+          </a:p>
+        </p:txBody>
+      </p:sp>
+      <p:sp>
+        <p:nvSpPr>
+          <p:cNvPr id="24" name="Rectangle 23"/>
+          <p:cNvSpPr/>
+          <p:nvPr/>
+        </p:nvSpPr>
+        <p:spPr>
+          <a:xfrm>
+            <a:off x="3474720" y="2834639"/>
+            <a:ext cx="2377440" cy="457200"/>
+          </a:xfrm>
+          <a:prstGeom prst="rect">
+            <a:avLst/>
+          </a:prstGeom>
+          <a:solidFill>
+            <a:srgbClr val="FFFFFF"/>
+          </a:solidFill>
+          <a:ln w="12700">
+            <a:solidFill>
+              <a:srgbClr val="1E2761"/>
+            </a:solidFill>
+          </a:ln>
+        </p:spPr>
+        <p:style>
+          <a:lnRef idx="1">
+            <a:schemeClr val="accent1"/>
+          </a:lnRef>
+          <a:fillRef idx="3">
+            <a:schemeClr val="accent1"/>
+          </a:fillRef>
+          <a:effectRef idx="2">
+            <a:schemeClr val="accent1"/>
+          </a:effectRef>
+          <a:fontRef idx="minor">
+            <a:schemeClr val="lt1"/>
+          </a:fontRef>
+        </p:style>
+        <p:txBody>
+          <a:bodyPr rtlCol="0" anchor="ctr"/>
+          <a:lstStyle/>
+          <a:p>
+            <a:pPr algn="ctr"/>
+          </a:p>
+        </p:txBody>
+      </p:sp>
+      <p:sp>
+        <p:nvSpPr>
+          <p:cNvPr id="25" name="TextBox 24"/>
+          <p:cNvSpPr txBox="1"/>
+          <p:nvPr/>
+        </p:nvSpPr>
+        <p:spPr>
+          <a:xfrm>
+            <a:off x="3566160" y="2880359"/>
+            <a:ext cx="2194560" cy="365760"/>
+          </a:xfrm>
+          <a:prstGeom prst="rect">
+            <a:avLst/>
+          </a:prstGeom>
+          <a:noFill/>
+        </p:spPr>
+        <p:txBody>
+          <a:bodyPr wrap="none">
+            <a:spAutoFit/>
+          </a:bodyPr>
+          <a:lstStyle/>
+          <a:p>
+            <a:pPr algn="ctr">
+              <a:defRPr sz="1400">
+                <a:solidFill>
+                  <a:srgbClr val="1E2761"/>
+                </a:solidFill>
+              </a:defRPr>
+            </a:pPr>
+            <a:r>
+              <a:t>✗</a:t>
+            </a:r>
+          </a:p>
+        </p:txBody>
+      </p:sp>
+      <p:sp>
+        <p:nvSpPr>
+          <p:cNvPr id="26" name="Rectangle 25"/>
+          <p:cNvSpPr/>
+          <p:nvPr/>
+        </p:nvSpPr>
+        <p:spPr>
+          <a:xfrm>
+            <a:off x="6035040" y="2834639"/>
+            <a:ext cx="2377440" cy="457200"/>
+          </a:xfrm>
+          <a:prstGeom prst="rect">
+            <a:avLst/>
+          </a:prstGeom>
+          <a:solidFill>
+            <a:srgbClr val="90E0EF"/>
+          </a:solidFill>
+          <a:ln w="12700">
+            <a:solidFill>
+              <a:srgbClr val="1E2761"/>
+            </a:solidFill>
+          </a:ln>
+        </p:spPr>
+        <p:style>
+          <a:lnRef idx="1">
+            <a:schemeClr val="accent1"/>
+          </a:lnRef>
+          <a:fillRef idx="3">
+            <a:schemeClr val="accent1"/>
+          </a:fillRef>
+          <a:effectRef idx="2">
+            <a:schemeClr val="accent1"/>
+          </a:effectRef>
+          <a:fontRef idx="minor">
+            <a:schemeClr val="lt1"/>
+          </a:fontRef>
+        </p:style>
+        <p:txBody>
+          <a:bodyPr rtlCol="0" anchor="ctr"/>
+          <a:lstStyle/>
+          <a:p>
+            <a:pPr algn="ctr"/>
+          </a:p>
+        </p:txBody>
+      </p:sp>
+      <p:sp>
+        <p:nvSpPr>
+          <p:cNvPr id="27" name="TextBox 26"/>
+          <p:cNvSpPr txBox="1"/>
+          <p:nvPr/>
+        </p:nvSpPr>
+        <p:spPr>
+          <a:xfrm>
+            <a:off x="6126479" y="2880359"/>
+            <a:ext cx="2194560" cy="365760"/>
+          </a:xfrm>
+          <a:prstGeom prst="rect">
+            <a:avLst/>
+          </a:prstGeom>
+          <a:noFill/>
+        </p:spPr>
+        <p:txBody>
+          <a:bodyPr wrap="none">
+            <a:spAutoFit/>
+          </a:bodyPr>
+          <a:lstStyle/>
+          <a:p>
+            <a:pPr algn="ctr">
+              <a:defRPr sz="1400">
+                <a:solidFill>
+                  <a:srgbClr val="1E2761"/>
+                </a:solidFill>
+              </a:defRPr>
+            </a:pPr>
+            <a:r>
+              <a:t>✓</a:t>
+            </a:r>
+          </a:p>
+        </p:txBody>
+      </p:sp>
+      <p:sp>
+        <p:nvSpPr>
+          <p:cNvPr id="28" name="Rectangle 27"/>
+          <p:cNvSpPr/>
+          <p:nvPr/>
+        </p:nvSpPr>
+        <p:spPr>
+          <a:xfrm>
+            <a:off x="914400" y="3383280"/>
+            <a:ext cx="2377440" cy="457200"/>
+          </a:xfrm>
+          <a:prstGeom prst="rect">
+            <a:avLst/>
+          </a:prstGeom>
+          <a:solidFill>
+            <a:srgbClr val="CADCFC"/>
+          </a:solidFill>
+          <a:ln w="12700">
+            <a:solidFill>
+              <a:srgbClr val="1E2761"/>
+            </a:solidFill>
+          </a:ln>
+        </p:spPr>
+        <p:style>
+          <a:lnRef idx="1">
+            <a:schemeClr val="accent1"/>
+          </a:lnRef>
+          <a:fillRef idx="3">
+            <a:schemeClr val="accent1"/>
+          </a:fillRef>
+          <a:effectRef idx="2">
+            <a:schemeClr val="accent1"/>
+          </a:effectRef>
+          <a:fontRef idx="minor">
+            <a:schemeClr val="lt1"/>
+          </a:fontRef>
+        </p:style>
+        <p:txBody>
+          <a:bodyPr rtlCol="0" anchor="ctr"/>
+          <a:lstStyle/>
+          <a:p>
+            <a:pPr algn="ctr"/>
+          </a:p>
+        </p:txBody>
+      </p:sp>
+      <p:sp>
+        <p:nvSpPr>
+          <p:cNvPr id="29" name="TextBox 28"/>
+          <p:cNvSpPr txBox="1"/>
+          <p:nvPr/>
+        </p:nvSpPr>
+        <p:spPr>
+          <a:xfrm>
+            <a:off x="1005840" y="3429000"/>
+            <a:ext cx="2194560" cy="365760"/>
+          </a:xfrm>
+          <a:prstGeom prst="rect">
+            <a:avLst/>
+          </a:prstGeom>
+          <a:noFill/>
+        </p:spPr>
+        <p:txBody>
+          <a:bodyPr wrap="none">
+            <a:spAutoFit/>
+          </a:bodyPr>
+          <a:lstStyle/>
+          <a:p>
+            <a:pPr algn="ctr">
+              <a:defRPr sz="1400">
+                <a:solidFill>
+                  <a:srgbClr val="1E2761"/>
+                </a:solidFill>
+              </a:defRPr>
+            </a:pPr>
+            <a:r>
+              <a:t>DELETE /games/:id</a:t>
+            </a:r>
+          </a:p>
+        </p:txBody>
+      </p:sp>
+      <p:sp>
+        <p:nvSpPr>
+          <p:cNvPr id="30" name="Rectangle 29"/>
+          <p:cNvSpPr/>
+          <p:nvPr/>
+        </p:nvSpPr>
+        <p:spPr>
+          <a:xfrm>
+            <a:off x="3474720" y="3383280"/>
+            <a:ext cx="2377440" cy="457200"/>
+          </a:xfrm>
+          <a:prstGeom prst="rect">
+            <a:avLst/>
+          </a:prstGeom>
+          <a:solidFill>
+            <a:srgbClr val="FFFFFF"/>
+          </a:solidFill>
+          <a:ln w="12700">
+            <a:solidFill>
+              <a:srgbClr val="1E2761"/>
+            </a:solidFill>
+          </a:ln>
+        </p:spPr>
+        <p:style>
+          <a:lnRef idx="1">
+            <a:schemeClr val="accent1"/>
+          </a:lnRef>
+          <a:fillRef idx="3">
+            <a:schemeClr val="accent1"/>
+          </a:fillRef>
+          <a:effectRef idx="2">
+            <a:schemeClr val="accent1"/>
+          </a:effectRef>
+          <a:fontRef idx="minor">
+            <a:schemeClr val="lt1"/>
+          </a:fontRef>
+        </p:style>
+        <p:txBody>
+          <a:bodyPr rtlCol="0" anchor="ctr"/>
+          <a:lstStyle/>
+          <a:p>
+            <a:pPr algn="ctr"/>
+          </a:p>
+        </p:txBody>
+      </p:sp>
+      <p:sp>
+        <p:nvSpPr>
+          <p:cNvPr id="31" name="TextBox 30"/>
+          <p:cNvSpPr txBox="1"/>
+          <p:nvPr/>
+        </p:nvSpPr>
+        <p:spPr>
+          <a:xfrm>
+            <a:off x="3566160" y="3429000"/>
+            <a:ext cx="2194560" cy="365760"/>
+          </a:xfrm>
+          <a:prstGeom prst="rect">
+            <a:avLst/>
+          </a:prstGeom>
+          <a:noFill/>
+        </p:spPr>
+        <p:txBody>
+          <a:bodyPr wrap="none">
+            <a:spAutoFit/>
+          </a:bodyPr>
+          <a:lstStyle/>
+          <a:p>
+            <a:pPr algn="ctr">
+              <a:defRPr sz="1400">
+                <a:solidFill>
+                  <a:srgbClr val="1E2761"/>
+                </a:solidFill>
+              </a:defRPr>
+            </a:pPr>
+            <a:r>
+              <a:t>✗</a:t>
+            </a:r>
+          </a:p>
+        </p:txBody>
+      </p:sp>
+      <p:sp>
+        <p:nvSpPr>
+          <p:cNvPr id="32" name="Rectangle 31"/>
+          <p:cNvSpPr/>
+          <p:nvPr/>
+        </p:nvSpPr>
+        <p:spPr>
+          <a:xfrm>
+            <a:off x="6035040" y="3383280"/>
+            <a:ext cx="2377440" cy="457200"/>
+          </a:xfrm>
+          <a:prstGeom prst="rect">
+            <a:avLst/>
+          </a:prstGeom>
+          <a:solidFill>
+            <a:srgbClr val="90E0EF"/>
+          </a:solidFill>
+          <a:ln w="12700">
+            <a:solidFill>
+              <a:srgbClr val="1E2761"/>
+            </a:solidFill>
+          </a:ln>
+        </p:spPr>
+        <p:style>
+          <a:lnRef idx="1">
+            <a:schemeClr val="accent1"/>
+          </a:lnRef>
+          <a:fillRef idx="3">
+            <a:schemeClr val="accent1"/>
+          </a:fillRef>
+          <a:effectRef idx="2">
+            <a:schemeClr val="accent1"/>
+          </a:effectRef>
+          <a:fontRef idx="minor">
+            <a:schemeClr val="lt1"/>
+          </a:fontRef>
+        </p:style>
+        <p:txBody>
+          <a:bodyPr rtlCol="0" anchor="ctr"/>
+          <a:lstStyle/>
+          <a:p>
+            <a:pPr algn="ctr"/>
+          </a:p>
+        </p:txBody>
+      </p:sp>
+      <p:sp>
+        <p:nvSpPr>
+          <p:cNvPr id="33" name="TextBox 32"/>
+          <p:cNvSpPr txBox="1"/>
+          <p:nvPr/>
+        </p:nvSpPr>
+        <p:spPr>
+          <a:xfrm>
+            <a:off x="6126479" y="3429000"/>
+            <a:ext cx="2194560" cy="365760"/>
+          </a:xfrm>
+          <a:prstGeom prst="rect">
+            <a:avLst/>
+          </a:prstGeom>
+          <a:noFill/>
+        </p:spPr>
+        <p:txBody>
+          <a:bodyPr wrap="none">
+            <a:spAutoFit/>
+          </a:bodyPr>
+          <a:lstStyle/>
+          <a:p>
+            <a:pPr algn="ctr">
+              <a:defRPr sz="1400">
+                <a:solidFill>
+                  <a:srgbClr val="1E2761"/>
+                </a:solidFill>
+              </a:defRPr>
+            </a:pPr>
+            <a:r>
+              <a:t>✓</a:t>
             </a:r>
           </a:p>
         </p:txBody>
@@ -4373,11 +6394,11 @@
             <a:avLst/>
           </a:prstGeom>
           <a:solidFill>
-            <a:srgbClr val="1E3A5F"/>
+            <a:srgbClr val="1E2761"/>
           </a:solidFill>
           <a:ln>
             <a:solidFill>
-              <a:srgbClr val="1E3A5F"/>
+              <a:srgbClr val="1E2761"/>
             </a:solidFill>
           </a:ln>
         </p:spPr>
@@ -4426,14 +6447,14 @@
           <a:lstStyle/>
           <a:p>
             <a:pPr>
-              <a:defRPr sz="3200" b="1">
+              <a:defRPr sz="3600" b="1">
                 <a:solidFill>
                   <a:srgbClr val="FFFFFF"/>
                 </a:solidFill>
               </a:defRPr>
             </a:pPr>
             <a:r>
-              <a:t>Implementierte Features</a:t>
+              <a:t>Features &amp; Testing</a:t>
             </a:r>
           </a:p>
         </p:txBody>
@@ -4446,8 +6467,8 @@
         </p:nvSpPr>
         <p:spPr>
           <a:xfrm>
-            <a:off x="914400" y="1097280"/>
-            <a:ext cx="7772400" cy="548640"/>
+            <a:off x="457200" y="1097280"/>
+            <a:ext cx="3657600" cy="320040"/>
           </a:xfrm>
           <a:prstGeom prst="rect">
             <a:avLst/>
@@ -4455,20 +6476,20 @@
           <a:noFill/>
         </p:spPr>
         <p:txBody>
-          <a:bodyPr wrap="square">
+          <a:bodyPr wrap="none">
             <a:spAutoFit/>
           </a:bodyPr>
           <a:lstStyle/>
           <a:p>
             <a:pPr>
-              <a:defRPr sz="1800">
-                <a:solidFill>
-                  <a:srgbClr val="2C3E50"/>
+              <a:defRPr sz="1800" b="1">
+                <a:solidFill>
+                  <a:srgbClr val="1E2761"/>
                 </a:solidFill>
               </a:defRPr>
             </a:pPr>
             <a:r>
-              <a:t>✓ 8 Sample Games (Elden Ring, Witcher 3, Baldur's Gate 3, ...)</a:t>
+              <a:t>✓ Features</a:t>
             </a:r>
           </a:p>
         </p:txBody>
@@ -4481,8 +6502,8 @@
         </p:nvSpPr>
         <p:spPr>
           <a:xfrm>
-            <a:off x="914400" y="1691640"/>
-            <a:ext cx="7772400" cy="548640"/>
+            <a:off x="640080" y="1554480"/>
+            <a:ext cx="3657600" cy="320040"/>
           </a:xfrm>
           <a:prstGeom prst="rect">
             <a:avLst/>
@@ -4490,20 +6511,20 @@
           <a:noFill/>
         </p:spPr>
         <p:txBody>
-          <a:bodyPr wrap="square">
+          <a:bodyPr wrap="none">
             <a:spAutoFit/>
           </a:bodyPr>
           <a:lstStyle/>
           <a:p>
             <a:pPr>
-              <a:defRPr sz="1800">
+              <a:defRPr sz="1200">
                 <a:solidFill>
                   <a:srgbClr val="2C3E50"/>
                 </a:solidFill>
               </a:defRPr>
             </a:pPr>
             <a:r>
-              <a:t>✓ User Registration &amp; Login</a:t>
+              <a:t>• User Registration &amp; Login</a:t>
             </a:r>
           </a:p>
         </p:txBody>
@@ -4516,8 +6537,8 @@
         </p:nvSpPr>
         <p:spPr>
           <a:xfrm>
-            <a:off x="914400" y="2286000"/>
-            <a:ext cx="7772400" cy="548640"/>
+            <a:off x="640080" y="1920240"/>
+            <a:ext cx="3657600" cy="320040"/>
           </a:xfrm>
           <a:prstGeom prst="rect">
             <a:avLst/>
@@ -4525,20 +6546,20 @@
           <a:noFill/>
         </p:spPr>
         <p:txBody>
-          <a:bodyPr wrap="square">
+          <a:bodyPr wrap="none">
             <a:spAutoFit/>
           </a:bodyPr>
           <a:lstStyle/>
           <a:p>
             <a:pPr>
-              <a:defRPr sz="1800">
+              <a:defRPr sz="1200">
                 <a:solidFill>
                   <a:srgbClr val="2C3E50"/>
                 </a:solidFill>
               </a:defRPr>
             </a:pPr>
             <a:r>
-              <a:t>✓ Games anzeigen, bearbeiten, erstellen, löschen</a:t>
+              <a:t>• Game CRUD Operations</a:t>
             </a:r>
           </a:p>
         </p:txBody>
@@ -4551,8 +6572,8 @@
         </p:nvSpPr>
         <p:spPr>
           <a:xfrm>
-            <a:off x="914400" y="2880360"/>
-            <a:ext cx="7772400" cy="548640"/>
+            <a:off x="640080" y="2286000"/>
+            <a:ext cx="3657600" cy="320040"/>
           </a:xfrm>
           <a:prstGeom prst="rect">
             <a:avLst/>
@@ -4560,20 +6581,20 @@
           <a:noFill/>
         </p:spPr>
         <p:txBody>
-          <a:bodyPr wrap="square">
+          <a:bodyPr wrap="none">
             <a:spAutoFit/>
           </a:bodyPr>
           <a:lstStyle/>
           <a:p>
             <a:pPr>
-              <a:defRPr sz="1800">
+              <a:defRPr sz="1200">
                 <a:solidFill>
                   <a:srgbClr val="2C3E50"/>
                 </a:solidFill>
               </a:defRPr>
             </a:pPr>
             <a:r>
-              <a:t>✓ User-spezifische Games (userId in DB)</a:t>
+              <a:t>• User-specific Games</a:t>
             </a:r>
           </a:p>
         </p:txBody>
@@ -4586,8 +6607,8 @@
         </p:nvSpPr>
         <p:spPr>
           <a:xfrm>
-            <a:off x="914400" y="3474720"/>
-            <a:ext cx="7772400" cy="548640"/>
+            <a:off x="640080" y="2651760"/>
+            <a:ext cx="3657600" cy="320040"/>
           </a:xfrm>
           <a:prstGeom prst="rect">
             <a:avLst/>
@@ -4595,20 +6616,265 @@
           <a:noFill/>
         </p:spPr>
         <p:txBody>
-          <a:bodyPr wrap="square">
+          <a:bodyPr wrap="none">
             <a:spAutoFit/>
           </a:bodyPr>
           <a:lstStyle/>
           <a:p>
             <a:pPr>
-              <a:defRPr sz="1800">
+              <a:defRPr sz="1200">
                 <a:solidFill>
                   <a:srgbClr val="2C3E50"/>
                 </a:solidFill>
               </a:defRPr>
             </a:pPr>
             <a:r>
-              <a:t>✓ Responsive UI mit TailwindCSS</a:t>
+              <a:t>• Responsive UI</a:t>
+            </a:r>
+          </a:p>
+        </p:txBody>
+      </p:sp>
+      <p:sp>
+        <p:nvSpPr>
+          <p:cNvPr id="9" name="TextBox 8"/>
+          <p:cNvSpPr txBox="1"/>
+          <p:nvPr/>
+        </p:nvSpPr>
+        <p:spPr>
+          <a:xfrm>
+            <a:off x="640080" y="3017520"/>
+            <a:ext cx="3657600" cy="320040"/>
+          </a:xfrm>
+          <a:prstGeom prst="rect">
+            <a:avLst/>
+          </a:prstGeom>
+          <a:noFill/>
+        </p:spPr>
+        <p:txBody>
+          <a:bodyPr wrap="none">
+            <a:spAutoFit/>
+          </a:bodyPr>
+          <a:lstStyle/>
+          <a:p>
+            <a:pPr>
+              <a:defRPr sz="1200">
+                <a:solidFill>
+                  <a:srgbClr val="2C3E50"/>
+                </a:solidFill>
+              </a:defRPr>
+            </a:pPr>
+            <a:r>
+              <a:t>• Secure Password Storage</a:t>
+            </a:r>
+          </a:p>
+        </p:txBody>
+      </p:sp>
+      <p:sp>
+        <p:nvSpPr>
+          <p:cNvPr id="10" name="TextBox 9"/>
+          <p:cNvSpPr txBox="1"/>
+          <p:nvPr/>
+        </p:nvSpPr>
+        <p:spPr>
+          <a:xfrm>
+            <a:off x="4754880" y="1097280"/>
+            <a:ext cx="3657600" cy="320040"/>
+          </a:xfrm>
+          <a:prstGeom prst="rect">
+            <a:avLst/>
+          </a:prstGeom>
+          <a:noFill/>
+        </p:spPr>
+        <p:txBody>
+          <a:bodyPr wrap="none">
+            <a:spAutoFit/>
+          </a:bodyPr>
+          <a:lstStyle/>
+          <a:p>
+            <a:pPr>
+              <a:defRPr sz="1800" b="1">
+                <a:solidFill>
+                  <a:srgbClr val="1E2761"/>
+                </a:solidFill>
+              </a:defRPr>
+            </a:pPr>
+            <a:r>
+              <a:t>✓ Testing</a:t>
+            </a:r>
+          </a:p>
+        </p:txBody>
+      </p:sp>
+      <p:sp>
+        <p:nvSpPr>
+          <p:cNvPr id="11" name="TextBox 10"/>
+          <p:cNvSpPr txBox="1"/>
+          <p:nvPr/>
+        </p:nvSpPr>
+        <p:spPr>
+          <a:xfrm>
+            <a:off x="4937760" y="1554480"/>
+            <a:ext cx="3657600" cy="320040"/>
+          </a:xfrm>
+          <a:prstGeom prst="rect">
+            <a:avLst/>
+          </a:prstGeom>
+          <a:noFill/>
+        </p:spPr>
+        <p:txBody>
+          <a:bodyPr wrap="none">
+            <a:spAutoFit/>
+          </a:bodyPr>
+          <a:lstStyle/>
+          <a:p>
+            <a:pPr>
+              <a:defRPr sz="1200">
+                <a:solidFill>
+                  <a:srgbClr val="2C3E50"/>
+                </a:solidFill>
+              </a:defRPr>
+            </a:pPr>
+            <a:r>
+              <a:t>• 8 Unit Tests (GameServiceTest)</a:t>
+            </a:r>
+          </a:p>
+        </p:txBody>
+      </p:sp>
+      <p:sp>
+        <p:nvSpPr>
+          <p:cNvPr id="12" name="TextBox 11"/>
+          <p:cNvSpPr txBox="1"/>
+          <p:nvPr/>
+        </p:nvSpPr>
+        <p:spPr>
+          <a:xfrm>
+            <a:off x="4937760" y="1920240"/>
+            <a:ext cx="3657600" cy="320040"/>
+          </a:xfrm>
+          <a:prstGeom prst="rect">
+            <a:avLst/>
+          </a:prstGeom>
+          <a:noFill/>
+        </p:spPr>
+        <p:txBody>
+          <a:bodyPr wrap="none">
+            <a:spAutoFit/>
+          </a:bodyPr>
+          <a:lstStyle/>
+          <a:p>
+            <a:pPr>
+              <a:defRPr sz="1200">
+                <a:solidFill>
+                  <a:srgbClr val="2C3E50"/>
+                </a:solidFill>
+              </a:defRPr>
+            </a:pPr>
+            <a:r>
+              <a:t>• 5 Integration Tests (GameControllerTest)</a:t>
+            </a:r>
+          </a:p>
+        </p:txBody>
+      </p:sp>
+      <p:sp>
+        <p:nvSpPr>
+          <p:cNvPr id="13" name="TextBox 12"/>
+          <p:cNvSpPr txBox="1"/>
+          <p:nvPr/>
+        </p:nvSpPr>
+        <p:spPr>
+          <a:xfrm>
+            <a:off x="4937760" y="2286000"/>
+            <a:ext cx="3657600" cy="320040"/>
+          </a:xfrm>
+          <a:prstGeom prst="rect">
+            <a:avLst/>
+          </a:prstGeom>
+          <a:noFill/>
+        </p:spPr>
+        <p:txBody>
+          <a:bodyPr wrap="none">
+            <a:spAutoFit/>
+          </a:bodyPr>
+          <a:lstStyle/>
+          <a:p>
+            <a:pPr>
+              <a:defRPr sz="1200">
+                <a:solidFill>
+                  <a:srgbClr val="2C3E50"/>
+                </a:solidFill>
+              </a:defRPr>
+            </a:pPr>
+            <a:r>
+              <a:t>• 100% Test Pass Rate (13/13)</a:t>
+            </a:r>
+          </a:p>
+        </p:txBody>
+      </p:sp>
+      <p:sp>
+        <p:nvSpPr>
+          <p:cNvPr id="14" name="TextBox 13"/>
+          <p:cNvSpPr txBox="1"/>
+          <p:nvPr/>
+        </p:nvSpPr>
+        <p:spPr>
+          <a:xfrm>
+            <a:off x="4937760" y="2651760"/>
+            <a:ext cx="3657600" cy="320040"/>
+          </a:xfrm>
+          <a:prstGeom prst="rect">
+            <a:avLst/>
+          </a:prstGeom>
+          <a:noFill/>
+        </p:spPr>
+        <p:txBody>
+          <a:bodyPr wrap="none">
+            <a:spAutoFit/>
+          </a:bodyPr>
+          <a:lstStyle/>
+          <a:p>
+            <a:pPr>
+              <a:defRPr sz="1200">
+                <a:solidFill>
+                  <a:srgbClr val="2C3E50"/>
+                </a:solidFill>
+              </a:defRPr>
+            </a:pPr>
+            <a:r>
+              <a:t>• RBAC Authorization Testing</a:t>
+            </a:r>
+          </a:p>
+        </p:txBody>
+      </p:sp>
+      <p:sp>
+        <p:nvSpPr>
+          <p:cNvPr id="15" name="TextBox 14"/>
+          <p:cNvSpPr txBox="1"/>
+          <p:nvPr/>
+        </p:nvSpPr>
+        <p:spPr>
+          <a:xfrm>
+            <a:off x="4937760" y="3017520"/>
+            <a:ext cx="3657600" cy="320040"/>
+          </a:xfrm>
+          <a:prstGeom prst="rect">
+            <a:avLst/>
+          </a:prstGeom>
+          <a:noFill/>
+        </p:spPr>
+        <p:txBody>
+          <a:bodyPr wrap="none">
+            <a:spAutoFit/>
+          </a:bodyPr>
+          <a:lstStyle/>
+          <a:p>
+            <a:pPr>
+              <a:defRPr sz="1200">
+                <a:solidFill>
+                  <a:srgbClr val="2C3E50"/>
+                </a:solidFill>
+              </a:defRPr>
+            </a:pPr>
+            <a:r>
+              <a:t>• JWT Token Validation Testing</a:t>
             </a:r>
           </a:p>
         </p:txBody>
@@ -4622,79 +6888,6 @@
 </file>
 
 <file path=ppt/slides/slide7.xml><?xml version="1.0" encoding="utf-8"?>
-<p:sld xmlns:a="http://schemas.openxmlformats.org/drawingml/2006/main" xmlns:p="http://schemas.openxmlformats.org/presentationml/2006/main" xmlns:r="http://schemas.openxmlformats.org/officeDocument/2006/relationships">
-  <p:cSld>
-    <p:bg>
-      <p:bgPr>
-        <a:solidFill>
-          <a:srgbClr val="1E3A5F"/>
-        </a:solidFill>
-        <a:effectLst/>
-      </p:bgPr>
-    </p:bg>
-    <p:spTree>
-      <p:nvGrpSpPr>
-        <p:cNvPr id="1" name=""/>
-        <p:cNvGrpSpPr/>
-        <p:nvPr/>
-      </p:nvGrpSpPr>
-      <p:grpSpPr/>
-      <p:sp>
-        <p:nvSpPr>
-          <p:cNvPr id="2" name="TextBox 1"/>
-          <p:cNvSpPr txBox="1"/>
-          <p:nvPr/>
-        </p:nvSpPr>
-        <p:spPr>
-          <a:xfrm>
-            <a:off x="457200" y="1645920"/>
-            <a:ext cx="8229600" cy="1371600"/>
-          </a:xfrm>
-          <a:prstGeom prst="rect">
-            <a:avLst/>
-          </a:prstGeom>
-          <a:noFill/>
-        </p:spPr>
-        <p:txBody>
-          <a:bodyPr wrap="none">
-            <a:spAutoFit/>
-          </a:bodyPr>
-          <a:lstStyle/>
-          <a:p>
-            <a:pPr algn="ctr">
-              <a:defRPr sz="4800" b="1">
-                <a:solidFill>
-                  <a:srgbClr val="FFFFFF"/>
-                </a:solidFill>
-              </a:defRPr>
-            </a:pPr>
-            <a:r>
-              <a:t>🎮 LIVE DEMO</a:t>
-            </a:r>
-          </a:p>
-          <a:p>
-            <a:pPr algn="ctr">
-              <a:defRPr sz="2400" i="1">
-                <a:solidFill>
-                  <a:srgbClr val="FF6B35"/>
-                </a:solidFill>
-              </a:defRPr>
-            </a:pPr>
-            <a:r>
-              <a:t>localhost:5173</a:t>
-            </a:r>
-          </a:p>
-        </p:txBody>
-      </p:sp>
-    </p:spTree>
-  </p:cSld>
-  <p:clrMapOvr>
-    <a:masterClrMapping/>
-  </p:clrMapOvr>
-</p:sld>
-</file>
-
-<file path=ppt/slides/slide8.xml><?xml version="1.0" encoding="utf-8"?>
 <p:sld xmlns:a="http://schemas.openxmlformats.org/drawingml/2006/main" xmlns:p="http://schemas.openxmlformats.org/presentationml/2006/main" xmlns:r="http://schemas.openxmlformats.org/officeDocument/2006/relationships">
   <p:cSld>
     <p:bg>
@@ -4727,11 +6920,11 @@
             <a:avLst/>
           </a:prstGeom>
           <a:solidFill>
-            <a:srgbClr val="1E3A5F"/>
+            <a:srgbClr val="1E2761"/>
           </a:solidFill>
           <a:ln>
             <a:solidFill>
-              <a:srgbClr val="1E3A5F"/>
+              <a:srgbClr val="1E2761"/>
             </a:solidFill>
           </a:ln>
         </p:spPr>
@@ -4780,14 +6973,766 @@
           <a:lstStyle/>
           <a:p>
             <a:pPr>
-              <a:defRPr sz="3200" b="1">
+              <a:defRPr sz="3600" b="1">
                 <a:solidFill>
                   <a:srgbClr val="FFFFFF"/>
                 </a:solidFill>
               </a:defRPr>
             </a:pPr>
             <a:r>
-              <a:t>Fazit</a:t>
+              <a:t>Database Schema</a:t>
+            </a:r>
+          </a:p>
+        </p:txBody>
+      </p:sp>
+      <p:sp>
+        <p:nvSpPr>
+          <p:cNvPr id="4" name="Rectangle 3"/>
+          <p:cNvSpPr/>
+          <p:nvPr/>
+        </p:nvSpPr>
+        <p:spPr>
+          <a:xfrm>
+            <a:off x="365760" y="1188720"/>
+            <a:ext cx="2743200" cy="365760"/>
+          </a:xfrm>
+          <a:prstGeom prst="rect">
+            <a:avLst/>
+          </a:prstGeom>
+          <a:solidFill>
+            <a:srgbClr val="00B4D8"/>
+          </a:solidFill>
+          <a:ln>
+            <a:solidFill>
+              <a:srgbClr val="00B4D8"/>
+            </a:solidFill>
+          </a:ln>
+        </p:spPr>
+        <p:style>
+          <a:lnRef idx="1">
+            <a:schemeClr val="accent1"/>
+          </a:lnRef>
+          <a:fillRef idx="3">
+            <a:schemeClr val="accent1"/>
+          </a:fillRef>
+          <a:effectRef idx="2">
+            <a:schemeClr val="accent1"/>
+          </a:effectRef>
+          <a:fontRef idx="minor">
+            <a:schemeClr val="lt1"/>
+          </a:fontRef>
+        </p:style>
+        <p:txBody>
+          <a:bodyPr rtlCol="0" anchor="ctr"/>
+          <a:lstStyle/>
+          <a:p>
+            <a:pPr algn="ctr"/>
+          </a:p>
+        </p:txBody>
+      </p:sp>
+      <p:sp>
+        <p:nvSpPr>
+          <p:cNvPr id="5" name="TextBox 4"/>
+          <p:cNvSpPr txBox="1"/>
+          <p:nvPr/>
+        </p:nvSpPr>
+        <p:spPr>
+          <a:xfrm>
+            <a:off x="457200" y="1234440"/>
+            <a:ext cx="2560320" cy="274320"/>
+          </a:xfrm>
+          <a:prstGeom prst="rect">
+            <a:avLst/>
+          </a:prstGeom>
+          <a:noFill/>
+        </p:spPr>
+        <p:txBody>
+          <a:bodyPr wrap="none">
+            <a:spAutoFit/>
+          </a:bodyPr>
+          <a:lstStyle/>
+          <a:p>
+            <a:pPr algn="ctr">
+              <a:defRPr sz="1300" b="1">
+                <a:solidFill>
+                  <a:srgbClr val="FFFFFF"/>
+                </a:solidFill>
+              </a:defRPr>
+            </a:pPr>
+            <a:r>
+              <a:t>users</a:t>
+            </a:r>
+          </a:p>
+        </p:txBody>
+      </p:sp>
+      <p:sp>
+        <p:nvSpPr>
+          <p:cNvPr id="6" name="TextBox 5"/>
+          <p:cNvSpPr txBox="1"/>
+          <p:nvPr/>
+        </p:nvSpPr>
+        <p:spPr>
+          <a:xfrm>
+            <a:off x="548640" y="1691640"/>
+            <a:ext cx="2560320" cy="274320"/>
+          </a:xfrm>
+          <a:prstGeom prst="rect">
+            <a:avLst/>
+          </a:prstGeom>
+          <a:noFill/>
+        </p:spPr>
+        <p:txBody>
+          <a:bodyPr wrap="none">
+            <a:spAutoFit/>
+          </a:bodyPr>
+          <a:lstStyle/>
+          <a:p>
+            <a:pPr>
+              <a:defRPr sz="1000">
+                <a:solidFill>
+                  <a:srgbClr val="2C3E50"/>
+                </a:solidFill>
+              </a:defRPr>
+            </a:pPr>
+            <a:r>
+              <a:t>• id (PK)</a:t>
+            </a:r>
+          </a:p>
+        </p:txBody>
+      </p:sp>
+      <p:sp>
+        <p:nvSpPr>
+          <p:cNvPr id="7" name="TextBox 6"/>
+          <p:cNvSpPr txBox="1"/>
+          <p:nvPr/>
+        </p:nvSpPr>
+        <p:spPr>
+          <a:xfrm>
+            <a:off x="548640" y="2011680"/>
+            <a:ext cx="2560320" cy="274320"/>
+          </a:xfrm>
+          <a:prstGeom prst="rect">
+            <a:avLst/>
+          </a:prstGeom>
+          <a:noFill/>
+        </p:spPr>
+        <p:txBody>
+          <a:bodyPr wrap="none">
+            <a:spAutoFit/>
+          </a:bodyPr>
+          <a:lstStyle/>
+          <a:p>
+            <a:pPr>
+              <a:defRPr sz="1000">
+                <a:solidFill>
+                  <a:srgbClr val="2C3E50"/>
+                </a:solidFill>
+              </a:defRPr>
+            </a:pPr>
+            <a:r>
+              <a:t>• username (UNIQUE)</a:t>
+            </a:r>
+          </a:p>
+        </p:txBody>
+      </p:sp>
+      <p:sp>
+        <p:nvSpPr>
+          <p:cNvPr id="8" name="TextBox 7"/>
+          <p:cNvSpPr txBox="1"/>
+          <p:nvPr/>
+        </p:nvSpPr>
+        <p:spPr>
+          <a:xfrm>
+            <a:off x="548640" y="2331720"/>
+            <a:ext cx="2560320" cy="274320"/>
+          </a:xfrm>
+          <a:prstGeom prst="rect">
+            <a:avLst/>
+          </a:prstGeom>
+          <a:noFill/>
+        </p:spPr>
+        <p:txBody>
+          <a:bodyPr wrap="none">
+            <a:spAutoFit/>
+          </a:bodyPr>
+          <a:lstStyle/>
+          <a:p>
+            <a:pPr>
+              <a:defRPr sz="1000">
+                <a:solidFill>
+                  <a:srgbClr val="2C3E50"/>
+                </a:solidFill>
+              </a:defRPr>
+            </a:pPr>
+            <a:r>
+              <a:t>• email (UNIQUE)</a:t>
+            </a:r>
+          </a:p>
+        </p:txBody>
+      </p:sp>
+      <p:sp>
+        <p:nvSpPr>
+          <p:cNvPr id="9" name="TextBox 8"/>
+          <p:cNvSpPr txBox="1"/>
+          <p:nvPr/>
+        </p:nvSpPr>
+        <p:spPr>
+          <a:xfrm>
+            <a:off x="548640" y="2651760"/>
+            <a:ext cx="2560320" cy="274320"/>
+          </a:xfrm>
+          <a:prstGeom prst="rect">
+            <a:avLst/>
+          </a:prstGeom>
+          <a:noFill/>
+        </p:spPr>
+        <p:txBody>
+          <a:bodyPr wrap="none">
+            <a:spAutoFit/>
+          </a:bodyPr>
+          <a:lstStyle/>
+          <a:p>
+            <a:pPr>
+              <a:defRPr sz="1000">
+                <a:solidFill>
+                  <a:srgbClr val="2C3E50"/>
+                </a:solidFill>
+              </a:defRPr>
+            </a:pPr>
+            <a:r>
+              <a:t>• password (BCrypt)</a:t>
+            </a:r>
+          </a:p>
+        </p:txBody>
+      </p:sp>
+      <p:sp>
+        <p:nvSpPr>
+          <p:cNvPr id="10" name="TextBox 9"/>
+          <p:cNvSpPr txBox="1"/>
+          <p:nvPr/>
+        </p:nvSpPr>
+        <p:spPr>
+          <a:xfrm>
+            <a:off x="548640" y="2971800"/>
+            <a:ext cx="2560320" cy="274320"/>
+          </a:xfrm>
+          <a:prstGeom prst="rect">
+            <a:avLst/>
+          </a:prstGeom>
+          <a:noFill/>
+        </p:spPr>
+        <p:txBody>
+          <a:bodyPr wrap="none">
+            <a:spAutoFit/>
+          </a:bodyPr>
+          <a:lstStyle/>
+          <a:p>
+            <a:pPr>
+              <a:defRPr sz="1000">
+                <a:solidFill>
+                  <a:srgbClr val="2C3E50"/>
+                </a:solidFill>
+              </a:defRPr>
+            </a:pPr>
+            <a:r>
+              <a:t>• timestamps</a:t>
+            </a:r>
+          </a:p>
+        </p:txBody>
+      </p:sp>
+      <p:sp>
+        <p:nvSpPr>
+          <p:cNvPr id="11" name="Rectangle 10"/>
+          <p:cNvSpPr/>
+          <p:nvPr/>
+        </p:nvSpPr>
+        <p:spPr>
+          <a:xfrm>
+            <a:off x="3291840" y="1188720"/>
+            <a:ext cx="2743200" cy="365760"/>
+          </a:xfrm>
+          <a:prstGeom prst="rect">
+            <a:avLst/>
+          </a:prstGeom>
+          <a:solidFill>
+            <a:srgbClr val="00B4D8"/>
+          </a:solidFill>
+          <a:ln>
+            <a:solidFill>
+              <a:srgbClr val="00B4D8"/>
+            </a:solidFill>
+          </a:ln>
+        </p:spPr>
+        <p:style>
+          <a:lnRef idx="1">
+            <a:schemeClr val="accent1"/>
+          </a:lnRef>
+          <a:fillRef idx="3">
+            <a:schemeClr val="accent1"/>
+          </a:fillRef>
+          <a:effectRef idx="2">
+            <a:schemeClr val="accent1"/>
+          </a:effectRef>
+          <a:fontRef idx="minor">
+            <a:schemeClr val="lt1"/>
+          </a:fontRef>
+        </p:style>
+        <p:txBody>
+          <a:bodyPr rtlCol="0" anchor="ctr"/>
+          <a:lstStyle/>
+          <a:p>
+            <a:pPr algn="ctr"/>
+          </a:p>
+        </p:txBody>
+      </p:sp>
+      <p:sp>
+        <p:nvSpPr>
+          <p:cNvPr id="12" name="TextBox 11"/>
+          <p:cNvSpPr txBox="1"/>
+          <p:nvPr/>
+        </p:nvSpPr>
+        <p:spPr>
+          <a:xfrm>
+            <a:off x="3383280" y="1234440"/>
+            <a:ext cx="2560320" cy="274320"/>
+          </a:xfrm>
+          <a:prstGeom prst="rect">
+            <a:avLst/>
+          </a:prstGeom>
+          <a:noFill/>
+        </p:spPr>
+        <p:txBody>
+          <a:bodyPr wrap="none">
+            <a:spAutoFit/>
+          </a:bodyPr>
+          <a:lstStyle/>
+          <a:p>
+            <a:pPr algn="ctr">
+              <a:defRPr sz="1300" b="1">
+                <a:solidFill>
+                  <a:srgbClr val="FFFFFF"/>
+                </a:solidFill>
+              </a:defRPr>
+            </a:pPr>
+            <a:r>
+              <a:t>user_roles</a:t>
+            </a:r>
+          </a:p>
+        </p:txBody>
+      </p:sp>
+      <p:sp>
+        <p:nvSpPr>
+          <p:cNvPr id="13" name="TextBox 12"/>
+          <p:cNvSpPr txBox="1"/>
+          <p:nvPr/>
+        </p:nvSpPr>
+        <p:spPr>
+          <a:xfrm>
+            <a:off x="3474720" y="1691640"/>
+            <a:ext cx="2560320" cy="274320"/>
+          </a:xfrm>
+          <a:prstGeom prst="rect">
+            <a:avLst/>
+          </a:prstGeom>
+          <a:noFill/>
+        </p:spPr>
+        <p:txBody>
+          <a:bodyPr wrap="none">
+            <a:spAutoFit/>
+          </a:bodyPr>
+          <a:lstStyle/>
+          <a:p>
+            <a:pPr>
+              <a:defRPr sz="1000">
+                <a:solidFill>
+                  <a:srgbClr val="2C3E50"/>
+                </a:solidFill>
+              </a:defRPr>
+            </a:pPr>
+            <a:r>
+              <a:t>• user_id (FK)</a:t>
+            </a:r>
+          </a:p>
+        </p:txBody>
+      </p:sp>
+      <p:sp>
+        <p:nvSpPr>
+          <p:cNvPr id="14" name="TextBox 13"/>
+          <p:cNvSpPr txBox="1"/>
+          <p:nvPr/>
+        </p:nvSpPr>
+        <p:spPr>
+          <a:xfrm>
+            <a:off x="3474720" y="2011680"/>
+            <a:ext cx="2560320" cy="274320"/>
+          </a:xfrm>
+          <a:prstGeom prst="rect">
+            <a:avLst/>
+          </a:prstGeom>
+          <a:noFill/>
+        </p:spPr>
+        <p:txBody>
+          <a:bodyPr wrap="none">
+            <a:spAutoFit/>
+          </a:bodyPr>
+          <a:lstStyle/>
+          <a:p>
+            <a:pPr>
+              <a:defRPr sz="1000">
+                <a:solidFill>
+                  <a:srgbClr val="2C3E50"/>
+                </a:solidFill>
+              </a:defRPr>
+            </a:pPr>
+            <a:r>
+              <a:t>• role (ROLE_USER/ADMIN)</a:t>
+            </a:r>
+          </a:p>
+        </p:txBody>
+      </p:sp>
+      <p:sp>
+        <p:nvSpPr>
+          <p:cNvPr id="15" name="Rectangle 14"/>
+          <p:cNvSpPr/>
+          <p:nvPr/>
+        </p:nvSpPr>
+        <p:spPr>
+          <a:xfrm>
+            <a:off x="6217920" y="1188720"/>
+            <a:ext cx="2743200" cy="365760"/>
+          </a:xfrm>
+          <a:prstGeom prst="rect">
+            <a:avLst/>
+          </a:prstGeom>
+          <a:solidFill>
+            <a:srgbClr val="00B4D8"/>
+          </a:solidFill>
+          <a:ln>
+            <a:solidFill>
+              <a:srgbClr val="00B4D8"/>
+            </a:solidFill>
+          </a:ln>
+        </p:spPr>
+        <p:style>
+          <a:lnRef idx="1">
+            <a:schemeClr val="accent1"/>
+          </a:lnRef>
+          <a:fillRef idx="3">
+            <a:schemeClr val="accent1"/>
+          </a:fillRef>
+          <a:effectRef idx="2">
+            <a:schemeClr val="accent1"/>
+          </a:effectRef>
+          <a:fontRef idx="minor">
+            <a:schemeClr val="lt1"/>
+          </a:fontRef>
+        </p:style>
+        <p:txBody>
+          <a:bodyPr rtlCol="0" anchor="ctr"/>
+          <a:lstStyle/>
+          <a:p>
+            <a:pPr algn="ctr"/>
+          </a:p>
+        </p:txBody>
+      </p:sp>
+      <p:sp>
+        <p:nvSpPr>
+          <p:cNvPr id="16" name="TextBox 15"/>
+          <p:cNvSpPr txBox="1"/>
+          <p:nvPr/>
+        </p:nvSpPr>
+        <p:spPr>
+          <a:xfrm>
+            <a:off x="6309360" y="1234440"/>
+            <a:ext cx="2560320" cy="274320"/>
+          </a:xfrm>
+          <a:prstGeom prst="rect">
+            <a:avLst/>
+          </a:prstGeom>
+          <a:noFill/>
+        </p:spPr>
+        <p:txBody>
+          <a:bodyPr wrap="none">
+            <a:spAutoFit/>
+          </a:bodyPr>
+          <a:lstStyle/>
+          <a:p>
+            <a:pPr algn="ctr">
+              <a:defRPr sz="1300" b="1">
+                <a:solidFill>
+                  <a:srgbClr val="FFFFFF"/>
+                </a:solidFill>
+              </a:defRPr>
+            </a:pPr>
+            <a:r>
+              <a:t>games</a:t>
+            </a:r>
+          </a:p>
+        </p:txBody>
+      </p:sp>
+      <p:sp>
+        <p:nvSpPr>
+          <p:cNvPr id="17" name="TextBox 16"/>
+          <p:cNvSpPr txBox="1"/>
+          <p:nvPr/>
+        </p:nvSpPr>
+        <p:spPr>
+          <a:xfrm>
+            <a:off x="6400800" y="1691640"/>
+            <a:ext cx="2560320" cy="274320"/>
+          </a:xfrm>
+          <a:prstGeom prst="rect">
+            <a:avLst/>
+          </a:prstGeom>
+          <a:noFill/>
+        </p:spPr>
+        <p:txBody>
+          <a:bodyPr wrap="none">
+            <a:spAutoFit/>
+          </a:bodyPr>
+          <a:lstStyle/>
+          <a:p>
+            <a:pPr>
+              <a:defRPr sz="1000">
+                <a:solidFill>
+                  <a:srgbClr val="2C3E50"/>
+                </a:solidFill>
+              </a:defRPr>
+            </a:pPr>
+            <a:r>
+              <a:t>• id (PK)</a:t>
+            </a:r>
+          </a:p>
+        </p:txBody>
+      </p:sp>
+      <p:sp>
+        <p:nvSpPr>
+          <p:cNvPr id="18" name="TextBox 17"/>
+          <p:cNvSpPr txBox="1"/>
+          <p:nvPr/>
+        </p:nvSpPr>
+        <p:spPr>
+          <a:xfrm>
+            <a:off x="6400800" y="2011680"/>
+            <a:ext cx="2560320" cy="274320"/>
+          </a:xfrm>
+          <a:prstGeom prst="rect">
+            <a:avLst/>
+          </a:prstGeom>
+          <a:noFill/>
+        </p:spPr>
+        <p:txBody>
+          <a:bodyPr wrap="none">
+            <a:spAutoFit/>
+          </a:bodyPr>
+          <a:lstStyle/>
+          <a:p>
+            <a:pPr>
+              <a:defRPr sz="1000">
+                <a:solidFill>
+                  <a:srgbClr val="2C3E50"/>
+                </a:solidFill>
+              </a:defRPr>
+            </a:pPr>
+            <a:r>
+              <a:t>• user_id (FK)</a:t>
+            </a:r>
+          </a:p>
+        </p:txBody>
+      </p:sp>
+      <p:sp>
+        <p:nvSpPr>
+          <p:cNvPr id="19" name="TextBox 18"/>
+          <p:cNvSpPr txBox="1"/>
+          <p:nvPr/>
+        </p:nvSpPr>
+        <p:spPr>
+          <a:xfrm>
+            <a:off x="6400800" y="2331720"/>
+            <a:ext cx="2560320" cy="274320"/>
+          </a:xfrm>
+          <a:prstGeom prst="rect">
+            <a:avLst/>
+          </a:prstGeom>
+          <a:noFill/>
+        </p:spPr>
+        <p:txBody>
+          <a:bodyPr wrap="none">
+            <a:spAutoFit/>
+          </a:bodyPr>
+          <a:lstStyle/>
+          <a:p>
+            <a:pPr>
+              <a:defRPr sz="1000">
+                <a:solidFill>
+                  <a:srgbClr val="2C3E50"/>
+                </a:solidFill>
+              </a:defRPr>
+            </a:pPr>
+            <a:r>
+              <a:t>• title, steamAppId</a:t>
+            </a:r>
+          </a:p>
+        </p:txBody>
+      </p:sp>
+      <p:sp>
+        <p:nvSpPr>
+          <p:cNvPr id="20" name="TextBox 19"/>
+          <p:cNvSpPr txBox="1"/>
+          <p:nvPr/>
+        </p:nvSpPr>
+        <p:spPr>
+          <a:xfrm>
+            <a:off x="6400800" y="2651760"/>
+            <a:ext cx="2560320" cy="274320"/>
+          </a:xfrm>
+          <a:prstGeom prst="rect">
+            <a:avLst/>
+          </a:prstGeom>
+          <a:noFill/>
+        </p:spPr>
+        <p:txBody>
+          <a:bodyPr wrap="none">
+            <a:spAutoFit/>
+          </a:bodyPr>
+          <a:lstStyle/>
+          <a:p>
+            <a:pPr>
+              <a:defRPr sz="1000">
+                <a:solidFill>
+                  <a:srgbClr val="2C3E50"/>
+                </a:solidFill>
+              </a:defRPr>
+            </a:pPr>
+            <a:r>
+              <a:t>• playtimeHours, price</a:t>
+            </a:r>
+          </a:p>
+        </p:txBody>
+      </p:sp>
+      <p:sp>
+        <p:nvSpPr>
+          <p:cNvPr id="21" name="TextBox 20"/>
+          <p:cNvSpPr txBox="1"/>
+          <p:nvPr/>
+        </p:nvSpPr>
+        <p:spPr>
+          <a:xfrm>
+            <a:off x="6400800" y="2971800"/>
+            <a:ext cx="2560320" cy="274320"/>
+          </a:xfrm>
+          <a:prstGeom prst="rect">
+            <a:avLst/>
+          </a:prstGeom>
+          <a:noFill/>
+        </p:spPr>
+        <p:txBody>
+          <a:bodyPr wrap="none">
+            <a:spAutoFit/>
+          </a:bodyPr>
+          <a:lstStyle/>
+          <a:p>
+            <a:pPr>
+              <a:defRPr sz="1000">
+                <a:solidFill>
+                  <a:srgbClr val="2C3E50"/>
+                </a:solidFill>
+              </a:defRPr>
+            </a:pPr>
+            <a:r>
+              <a:t>• installed, lastPlayed</a:t>
+            </a:r>
+          </a:p>
+        </p:txBody>
+      </p:sp>
+    </p:spTree>
+  </p:cSld>
+  <p:clrMapOvr>
+    <a:masterClrMapping/>
+  </p:clrMapOvr>
+</p:sld>
+</file>
+
+<file path=ppt/slides/slide8.xml><?xml version="1.0" encoding="utf-8"?>
+<p:sld xmlns:a="http://schemas.openxmlformats.org/drawingml/2006/main" xmlns:p="http://schemas.openxmlformats.org/presentationml/2006/main" xmlns:r="http://schemas.openxmlformats.org/officeDocument/2006/relationships">
+  <p:cSld>
+    <p:bg>
+      <p:bgPr>
+        <a:solidFill>
+          <a:srgbClr val="1E2761"/>
+        </a:solidFill>
+        <a:effectLst/>
+      </p:bgPr>
+    </p:bg>
+    <p:spTree>
+      <p:nvGrpSpPr>
+        <p:cNvPr id="1" name=""/>
+        <p:cNvGrpSpPr/>
+        <p:nvPr/>
+      </p:nvGrpSpPr>
+      <p:grpSpPr/>
+      <p:sp>
+        <p:nvSpPr>
+          <p:cNvPr id="2" name="TextBox 1"/>
+          <p:cNvSpPr txBox="1"/>
+          <p:nvPr/>
+        </p:nvSpPr>
+        <p:spPr>
+          <a:xfrm>
+            <a:off x="0" y="1097280"/>
+            <a:ext cx="9144000" cy="914400"/>
+          </a:xfrm>
+          <a:prstGeom prst="rect">
+            <a:avLst/>
+          </a:prstGeom>
+          <a:noFill/>
+        </p:spPr>
+        <p:txBody>
+          <a:bodyPr wrap="none">
+            <a:spAutoFit/>
+          </a:bodyPr>
+          <a:lstStyle/>
+          <a:p>
+            <a:pPr algn="ctr">
+              <a:defRPr sz="9600"/>
+            </a:pPr>
+            <a:r>
+              <a:t>🎮</a:t>
+            </a:r>
+          </a:p>
+        </p:txBody>
+      </p:sp>
+      <p:sp>
+        <p:nvSpPr>
+          <p:cNvPr id="3" name="TextBox 2"/>
+          <p:cNvSpPr txBox="1"/>
+          <p:nvPr/>
+        </p:nvSpPr>
+        <p:spPr>
+          <a:xfrm>
+            <a:off x="457200" y="2286000"/>
+            <a:ext cx="8229600" cy="548640"/>
+          </a:xfrm>
+          <a:prstGeom prst="rect">
+            <a:avLst/>
+          </a:prstGeom>
+          <a:noFill/>
+        </p:spPr>
+        <p:txBody>
+          <a:bodyPr wrap="none">
+            <a:spAutoFit/>
+          </a:bodyPr>
+          <a:lstStyle/>
+          <a:p>
+            <a:pPr algn="ctr">
+              <a:defRPr sz="4800" b="1">
+                <a:solidFill>
+                  <a:srgbClr val="00B4D8"/>
+                </a:solidFill>
+              </a:defRPr>
+            </a:pPr>
+            <a:r>
+              <a:t>LIVE DEMO</a:t>
             </a:r>
           </a:p>
         </p:txBody>
@@ -4800,8 +7745,8 @@
         </p:nvSpPr>
         <p:spPr>
           <a:xfrm>
-            <a:off x="914400" y="1097280"/>
-            <a:ext cx="7772400" cy="548640"/>
+            <a:off x="457200" y="3017520"/>
+            <a:ext cx="8229600" cy="365760"/>
           </a:xfrm>
           <a:prstGeom prst="rect">
             <a:avLst/>
@@ -4809,20 +7754,20 @@
           <a:noFill/>
         </p:spPr>
         <p:txBody>
-          <a:bodyPr wrap="square">
+          <a:bodyPr wrap="none">
             <a:spAutoFit/>
           </a:bodyPr>
           <a:lstStyle/>
           <a:p>
-            <a:pPr>
-              <a:defRPr sz="1800">
-                <a:solidFill>
-                  <a:srgbClr val="2C3E50"/>
+            <a:pPr algn="ctr">
+              <a:defRPr sz="2400">
+                <a:solidFill>
+                  <a:srgbClr val="CADCFC"/>
                 </a:solidFill>
               </a:defRPr>
             </a:pPr>
             <a:r>
-              <a:t>✓ JWT-Authentifizierung vollständig implementiert</a:t>
+              <a:t>localhost:5173</a:t>
             </a:r>
           </a:p>
         </p:txBody>
@@ -4835,8 +7780,8 @@
         </p:nvSpPr>
         <p:spPr>
           <a:xfrm>
-            <a:off x="914400" y="1691640"/>
-            <a:ext cx="7772400" cy="548640"/>
+            <a:off x="457200" y="3566160"/>
+            <a:ext cx="8229600" cy="365760"/>
           </a:xfrm>
           <a:prstGeom prst="rect">
             <a:avLst/>
@@ -4844,20 +7789,196 @@
           <a:noFill/>
         </p:spPr>
         <p:txBody>
-          <a:bodyPr wrap="square">
+          <a:bodyPr wrap="none">
             <a:spAutoFit/>
           </a:bodyPr>
           <a:lstStyle/>
           <a:p>
+            <a:pPr algn="ctr">
+              <a:defRPr sz="1600">
+                <a:solidFill>
+                  <a:srgbClr val="90E0EF"/>
+                </a:solidFill>
+              </a:defRPr>
+            </a:pPr>
+            <a:r>
+              <a:t>Frontend + Backend + Database</a:t>
+            </a:r>
+          </a:p>
+        </p:txBody>
+      </p:sp>
+    </p:spTree>
+  </p:cSld>
+  <p:clrMapOvr>
+    <a:masterClrMapping/>
+  </p:clrMapOvr>
+</p:sld>
+</file>
+
+<file path=ppt/slides/slide9.xml><?xml version="1.0" encoding="utf-8"?>
+<p:sld xmlns:a="http://schemas.openxmlformats.org/drawingml/2006/main" xmlns:p="http://schemas.openxmlformats.org/presentationml/2006/main" xmlns:r="http://schemas.openxmlformats.org/officeDocument/2006/relationships">
+  <p:cSld>
+    <p:bg>
+      <p:bgPr>
+        <a:solidFill>
+          <a:srgbClr val="FFFFFF"/>
+        </a:solidFill>
+        <a:effectLst/>
+      </p:bgPr>
+    </p:bg>
+    <p:spTree>
+      <p:nvGrpSpPr>
+        <p:cNvPr id="1" name=""/>
+        <p:cNvGrpSpPr/>
+        <p:nvPr/>
+      </p:nvGrpSpPr>
+      <p:grpSpPr/>
+      <p:sp>
+        <p:nvSpPr>
+          <p:cNvPr id="2" name="Rectangle 1"/>
+          <p:cNvSpPr/>
+          <p:nvPr/>
+        </p:nvSpPr>
+        <p:spPr>
+          <a:xfrm>
+            <a:off x="0" y="0"/>
+            <a:ext cx="9144000" cy="731520"/>
+          </a:xfrm>
+          <a:prstGeom prst="rect">
+            <a:avLst/>
+          </a:prstGeom>
+          <a:solidFill>
+            <a:srgbClr val="1E2761"/>
+          </a:solidFill>
+          <a:ln>
+            <a:solidFill>
+              <a:srgbClr val="1E2761"/>
+            </a:solidFill>
+          </a:ln>
+        </p:spPr>
+        <p:style>
+          <a:lnRef idx="1">
+            <a:schemeClr val="accent1"/>
+          </a:lnRef>
+          <a:fillRef idx="3">
+            <a:schemeClr val="accent1"/>
+          </a:fillRef>
+          <a:effectRef idx="2">
+            <a:schemeClr val="accent1"/>
+          </a:effectRef>
+          <a:fontRef idx="minor">
+            <a:schemeClr val="lt1"/>
+          </a:fontRef>
+        </p:style>
+        <p:txBody>
+          <a:bodyPr rtlCol="0" anchor="ctr"/>
+          <a:lstStyle/>
+          <a:p>
+            <a:pPr algn="ctr"/>
+          </a:p>
+        </p:txBody>
+      </p:sp>
+      <p:sp>
+        <p:nvSpPr>
+          <p:cNvPr id="3" name="TextBox 2"/>
+          <p:cNvSpPr txBox="1"/>
+          <p:nvPr/>
+        </p:nvSpPr>
+        <p:spPr>
+          <a:xfrm>
+            <a:off x="457200" y="137160"/>
+            <a:ext cx="8229600" cy="457200"/>
+          </a:xfrm>
+          <a:prstGeom prst="rect">
+            <a:avLst/>
+          </a:prstGeom>
+          <a:noFill/>
+        </p:spPr>
+        <p:txBody>
+          <a:bodyPr wrap="none">
+            <a:spAutoFit/>
+          </a:bodyPr>
+          <a:lstStyle/>
+          <a:p>
             <a:pPr>
-              <a:defRPr sz="1800">
+              <a:defRPr sz="3600" b="1">
+                <a:solidFill>
+                  <a:srgbClr val="FFFFFF"/>
+                </a:solidFill>
+              </a:defRPr>
+            </a:pPr>
+            <a:r>
+              <a:t>Zusammenfassung</a:t>
+            </a:r>
+          </a:p>
+        </p:txBody>
+      </p:sp>
+      <p:sp>
+        <p:nvSpPr>
+          <p:cNvPr id="4" name="TextBox 3"/>
+          <p:cNvSpPr txBox="1"/>
+          <p:nvPr/>
+        </p:nvSpPr>
+        <p:spPr>
+          <a:xfrm>
+            <a:off x="914400" y="1188720"/>
+            <a:ext cx="7315200" cy="320040"/>
+          </a:xfrm>
+          <a:prstGeom prst="rect">
+            <a:avLst/>
+          </a:prstGeom>
+          <a:noFill/>
+        </p:spPr>
+        <p:txBody>
+          <a:bodyPr wrap="none">
+            <a:spAutoFit/>
+          </a:bodyPr>
+          <a:lstStyle/>
+          <a:p>
+            <a:pPr>
+              <a:defRPr sz="1400">
                 <a:solidFill>
                   <a:srgbClr val="2C3E50"/>
                 </a:solidFill>
               </a:defRPr>
             </a:pPr>
             <a:r>
-              <a:t>✓ RBAC mit Admin-Funktionen</a:t>
+              <a:t>✓ Vollständige JWT-Authentifizierung mit HMAC-SHA256</a:t>
+            </a:r>
+          </a:p>
+        </p:txBody>
+      </p:sp>
+      <p:sp>
+        <p:nvSpPr>
+          <p:cNvPr id="5" name="TextBox 4"/>
+          <p:cNvSpPr txBox="1"/>
+          <p:nvPr/>
+        </p:nvSpPr>
+        <p:spPr>
+          <a:xfrm>
+            <a:off x="914400" y="1645920"/>
+            <a:ext cx="7315200" cy="320040"/>
+          </a:xfrm>
+          <a:prstGeom prst="rect">
+            <a:avLst/>
+          </a:prstGeom>
+          <a:noFill/>
+        </p:spPr>
+        <p:txBody>
+          <a:bodyPr wrap="none">
+            <a:spAutoFit/>
+          </a:bodyPr>
+          <a:lstStyle/>
+          <a:p>
+            <a:pPr>
+              <a:defRPr sz="1400">
+                <a:solidFill>
+                  <a:srgbClr val="2C3E50"/>
+                </a:solidFill>
+              </a:defRPr>
+            </a:pPr>
+            <a:r>
+              <a:t>✓ RBAC mit Spring Security</a:t>
             </a:r>
           </a:p>
         </p:txBody>
@@ -4870,8 +7991,8 @@
         </p:nvSpPr>
         <p:spPr>
           <a:xfrm>
-            <a:off x="914400" y="2286000"/>
-            <a:ext cx="7772400" cy="548640"/>
+            <a:off x="914400" y="2103120"/>
+            <a:ext cx="7315200" cy="320040"/>
           </a:xfrm>
           <a:prstGeom prst="rect">
             <a:avLst/>
@@ -4879,20 +8000,20 @@
           <a:noFill/>
         </p:spPr>
         <p:txBody>
-          <a:bodyPr wrap="square">
+          <a:bodyPr wrap="none">
             <a:spAutoFit/>
           </a:bodyPr>
           <a:lstStyle/>
           <a:p>
             <a:pPr>
-              <a:defRPr sz="1800">
+              <a:defRPr sz="1400">
                 <a:solidFill>
                   <a:srgbClr val="2C3E50"/>
                 </a:solidFill>
               </a:defRPr>
             </a:pPr>
             <a:r>
-              <a:t>✓ Sichere API mit Spring Security</a:t>
+              <a:t>✓ Sichere Password-Speicherung (BCrypt)</a:t>
             </a:r>
           </a:p>
         </p:txBody>
@@ -4905,8 +8026,8 @@
         </p:nvSpPr>
         <p:spPr>
           <a:xfrm>
-            <a:off x="914400" y="2880360"/>
-            <a:ext cx="7772400" cy="548640"/>
+            <a:off x="914400" y="2560320"/>
+            <a:ext cx="7315200" cy="320040"/>
           </a:xfrm>
           <a:prstGeom prst="rect">
             <a:avLst/>
@@ -4914,20 +8035,20 @@
           <a:noFill/>
         </p:spPr>
         <p:txBody>
-          <a:bodyPr wrap="square">
+          <a:bodyPr wrap="none">
             <a:spAutoFit/>
           </a:bodyPr>
           <a:lstStyle/>
           <a:p>
             <a:pPr>
-              <a:defRPr sz="1800">
+              <a:defRPr sz="1400">
                 <a:solidFill>
                   <a:srgbClr val="2C3E50"/>
                 </a:solidFill>
               </a:defRPr>
             </a:pPr>
             <a:r>
-              <a:t>✓ Frontend &amp; Backend integriert</a:t>
+              <a:t>✓ React Frontend mit Context API</a:t>
             </a:r>
           </a:p>
         </p:txBody>
@@ -4940,8 +8061,43 @@
         </p:nvSpPr>
         <p:spPr>
           <a:xfrm>
+            <a:off x="914400" y="3017520"/>
+            <a:ext cx="7315200" cy="320040"/>
+          </a:xfrm>
+          <a:prstGeom prst="rect">
+            <a:avLst/>
+          </a:prstGeom>
+          <a:noFill/>
+        </p:spPr>
+        <p:txBody>
+          <a:bodyPr wrap="none">
+            <a:spAutoFit/>
+          </a:bodyPr>
+          <a:lstStyle/>
+          <a:p>
+            <a:pPr>
+              <a:defRPr sz="1400">
+                <a:solidFill>
+                  <a:srgbClr val="2C3E50"/>
+                </a:solidFill>
+              </a:defRPr>
+            </a:pPr>
+            <a:r>
+              <a:t>✓ Spring Boot REST API</a:t>
+            </a:r>
+          </a:p>
+        </p:txBody>
+      </p:sp>
+      <p:sp>
+        <p:nvSpPr>
+          <p:cNvPr id="9" name="TextBox 8"/>
+          <p:cNvSpPr txBox="1"/>
+          <p:nvPr/>
+        </p:nvSpPr>
+        <p:spPr>
+          <a:xfrm>
             <a:off x="914400" y="3474720"/>
-            <a:ext cx="7772400" cy="548640"/>
+            <a:ext cx="7315200" cy="320040"/>
           </a:xfrm>
           <a:prstGeom prst="rect">
             <a:avLst/>
@@ -4949,13 +8105,48 @@
           <a:noFill/>
         </p:spPr>
         <p:txBody>
-          <a:bodyPr wrap="square">
+          <a:bodyPr wrap="none">
             <a:spAutoFit/>
           </a:bodyPr>
           <a:lstStyle/>
           <a:p>
             <a:pPr>
-              <a:defRPr sz="1800">
+              <a:defRPr sz="1400">
+                <a:solidFill>
+                  <a:srgbClr val="2C3E50"/>
+                </a:solidFill>
+              </a:defRPr>
+            </a:pPr>
+            <a:r>
+              <a:t>✓ 13/13 Tests bestanden (100%)</a:t>
+            </a:r>
+          </a:p>
+        </p:txBody>
+      </p:sp>
+      <p:sp>
+        <p:nvSpPr>
+          <p:cNvPr id="10" name="TextBox 9"/>
+          <p:cNvSpPr txBox="1"/>
+          <p:nvPr/>
+        </p:nvSpPr>
+        <p:spPr>
+          <a:xfrm>
+            <a:off x="914400" y="3931920"/>
+            <a:ext cx="7315200" cy="320040"/>
+          </a:xfrm>
+          <a:prstGeom prst="rect">
+            <a:avLst/>
+          </a:prstGeom>
+          <a:noFill/>
+        </p:spPr>
+        <p:txBody>
+          <a:bodyPr wrap="none">
+            <a:spAutoFit/>
+          </a:bodyPr>
+          <a:lstStyle/>
+          <a:p>
+            <a:pPr>
+              <a:defRPr sz="1400">
                 <a:solidFill>
                   <a:srgbClr val="2C3E50"/>
                 </a:solidFill>
